--- a/sample_data/output_new.pptx
+++ b/sample_data/output_new.pptx
@@ -9111,22 +9111,181 @@
           </a:prstGeom>
         </p:spPr>
       </p:pic>
-      <p:sp>
-        <p:nvSpPr>
-          <p:cNvPr id="6" name="Oval 5"/>
+      <p:pic>
+        <p:nvPicPr>
+          <p:cNvPr id="6" name="Picture 5" descr="image.png"/>
+          <p:cNvPicPr>
+            <a:picLocks noChangeAspect="1"/>
+          </p:cNvPicPr>
+          <p:nvPr/>
+        </p:nvPicPr>
+        <p:blipFill>
+          <a:blip r:embed="rId3"/>
+          <a:stretch>
+            <a:fillRect/>
+          </a:stretch>
+        </p:blipFill>
+        <p:spPr>
+          <a:xfrm>
+            <a:off x="310896" y="4416552"/>
+            <a:ext cx="6099048" cy="274320"/>
+          </a:xfrm>
+          <a:prstGeom prst="rect">
+            <a:avLst/>
+          </a:prstGeom>
+        </p:spPr>
+      </p:pic>
+      <p:sp>
+        <p:nvSpPr>
+          <p:cNvPr id="7" name="TextBox 6"/>
+          <p:cNvSpPr txBox="1"/>
+          <p:nvPr/>
+        </p:nvSpPr>
+        <p:spPr>
+          <a:xfrm>
+            <a:off x="7068312" y="1463040"/>
+            <a:ext cx="4754879" cy="2880360"/>
+          </a:xfrm>
+          <a:prstGeom prst="rect">
+            <a:avLst/>
+          </a:prstGeom>
+          <a:noFill/>
+        </p:spPr>
+        <p:txBody>
+          <a:bodyPr wrap="square">
+            <a:spAutoFit/>
+          </a:bodyPr>
+          <a:lstStyle/>
+          <a:p>
+            <a:r>
+              <a:rPr sz="1000" b="0">
+                <a:solidFill>
+                  <a:srgbClr val="44546A"/>
+                </a:solidFill>
+                <a:latin typeface="DM Sans"/>
+              </a:rPr>
+              <a:t>Total agree by statement:</a:t>
+            </a:r>
+          </a:p>
+          <a:p>
+            <a:r>
+              <a:rPr sz="1000" b="0">
+                <a:solidFill>
+                  <a:srgbClr val="44546A"/>
+                </a:solidFill>
+                <a:latin typeface="DM Sans"/>
+              </a:rPr>
+              <a:t>– Community impact:   XX%</a:t>
+            </a:r>
+          </a:p>
+          <a:p>
+            <a:r>
+              <a:rPr sz="1000" b="0">
+                <a:solidFill>
+                  <a:srgbClr val="44546A"/>
+                </a:solidFill>
+                <a:latin typeface="DM Sans"/>
+              </a:rPr>
+              <a:t>– Govt leadership:    XX%</a:t>
+            </a:r>
+          </a:p>
+          <a:p>
+            <a:r>
+              <a:rPr sz="1000" b="0">
+                <a:solidFill>
+                  <a:srgbClr val="44546A"/>
+                </a:solidFill>
+                <a:latin typeface="DM Sans"/>
+              </a:rPr>
+              <a:t>– Local action:       XX%</a:t>
+            </a:r>
+          </a:p>
+          <a:p>
+            <a:r>
+              <a:rPr sz="1000" b="0">
+                <a:solidFill>
+                  <a:srgbClr val="44546A"/>
+                </a:solidFill>
+                <a:latin typeface="DM Sans"/>
+              </a:rPr>
+              <a:t/>
+            </a:r>
+          </a:p>
+          <a:p>
+            <a:r>
+              <a:rPr sz="1000" b="0">
+                <a:solidFill>
+                  <a:srgbClr val="44546A"/>
+                </a:solidFill>
+                <a:latin typeface="DM Sans"/>
+              </a:rPr>
+              <a:t>Agreement is broadly consistent</a:t>
+            </a:r>
+          </a:p>
+          <a:p>
+            <a:r>
+              <a:rPr sz="1000" b="0">
+                <a:solidFill>
+                  <a:srgbClr val="44546A"/>
+                </a:solidFill>
+                <a:latin typeface="DM Sans"/>
+              </a:rPr>
+              <a:t>across age groups and regions.</a:t>
+            </a:r>
+          </a:p>
+        </p:txBody>
+      </p:sp>
+      <p:sp>
+        <p:nvSpPr>
+          <p:cNvPr id="8" name="TextBox 7"/>
+          <p:cNvSpPr txBox="1"/>
+          <p:nvPr/>
+        </p:nvSpPr>
+        <p:spPr>
+          <a:xfrm>
+            <a:off x="1097280" y="6236208"/>
+            <a:ext cx="10058400" cy="256032"/>
+          </a:xfrm>
+          <a:prstGeom prst="rect">
+            <a:avLst/>
+          </a:prstGeom>
+          <a:noFill/>
+        </p:spPr>
+        <p:txBody>
+          <a:bodyPr wrap="square">
+            <a:spAutoFit/>
+          </a:bodyPr>
+          <a:lstStyle/>
+          <a:p>
+            <a:pPr algn="l"/>
+            <a:r>
+              <a:rPr sz="800" b="0" i="1">
+                <a:solidFill>
+                  <a:srgbClr val="44546A"/>
+                </a:solidFill>
+                <a:latin typeface="DM Sans"/>
+              </a:rPr>
+              <a:t>Base: all respondents (n=200)</a:t>
+            </a:r>
+          </a:p>
+        </p:txBody>
+      </p:sp>
+      <p:sp>
+        <p:nvSpPr>
+          <p:cNvPr id="9" name="Oval 8"/>
           <p:cNvSpPr/>
           <p:nvPr/>
         </p:nvSpPr>
         <p:spPr>
           <a:xfrm>
-            <a:off x="4505431" y="1686747"/>
-            <a:ext cx="637519" cy="637519"/>
+            <a:off x="11548872" y="6217920"/>
+            <a:ext cx="274320" cy="274320"/>
           </a:xfrm>
           <a:prstGeom prst="ellipse">
             <a:avLst/>
           </a:prstGeom>
           <a:solidFill>
-            <a:srgbClr val="00BDBB"/>
+            <a:srgbClr val="027F7C"/>
           </a:solidFill>
           <a:ln>
             <a:noFill/>
@@ -9156,400 +9315,7 @@
       </p:sp>
       <p:sp>
         <p:nvSpPr>
-          <p:cNvPr id="7" name="TextBox 6"/>
-          <p:cNvSpPr txBox="1"/>
-          <p:nvPr/>
-        </p:nvSpPr>
-        <p:spPr>
-          <a:xfrm>
-            <a:off x="4505431" y="1827002"/>
-            <a:ext cx="637519" cy="357011"/>
-          </a:xfrm>
-          <a:prstGeom prst="rect">
-            <a:avLst/>
-          </a:prstGeom>
-          <a:noFill/>
-        </p:spPr>
-        <p:txBody>
-          <a:bodyPr wrap="square">
-            <a:spAutoFit/>
-          </a:bodyPr>
-          <a:lstStyle/>
-          <a:p>
-            <a:pPr algn="ctr"/>
-            <a:r>
-              <a:rPr sz="1800" b="1" i="0">
-                <a:solidFill>
-                  <a:srgbClr val="FFFFFF"/>
-                </a:solidFill>
-                <a:latin typeface="DM Sans"/>
-              </a:rPr>
-              <a:t>68%</a:t>
-            </a:r>
-          </a:p>
-        </p:txBody>
-      </p:sp>
-      <p:sp>
-        <p:nvSpPr>
-          <p:cNvPr id="8" name="Oval 7"/>
-          <p:cNvSpPr/>
-          <p:nvPr/>
-        </p:nvSpPr>
-        <p:spPr>
-          <a:xfrm>
-            <a:off x="4261469" y="2483647"/>
-            <a:ext cx="637519" cy="637519"/>
-          </a:xfrm>
-          <a:prstGeom prst="ellipse">
-            <a:avLst/>
-          </a:prstGeom>
-          <a:solidFill>
-            <a:srgbClr val="00BDBB"/>
-          </a:solidFill>
-          <a:ln>
-            <a:noFill/>
-          </a:ln>
-        </p:spPr>
-        <p:style>
-          <a:lnRef idx="1">
-            <a:schemeClr val="accent1"/>
-          </a:lnRef>
-          <a:fillRef idx="3">
-            <a:schemeClr val="accent1"/>
-          </a:fillRef>
-          <a:effectRef idx="2">
-            <a:schemeClr val="accent1"/>
-          </a:effectRef>
-          <a:fontRef idx="minor">
-            <a:schemeClr val="lt1"/>
-          </a:fontRef>
-        </p:style>
-        <p:txBody>
-          <a:bodyPr rtlCol="0" anchor="ctr"/>
-          <a:lstStyle/>
-          <a:p>
-            <a:pPr algn="ctr"/>
-          </a:p>
-        </p:txBody>
-      </p:sp>
-      <p:sp>
-        <p:nvSpPr>
-          <p:cNvPr id="9" name="TextBox 8"/>
-          <p:cNvSpPr txBox="1"/>
-          <p:nvPr/>
-        </p:nvSpPr>
-        <p:spPr>
-          <a:xfrm>
-            <a:off x="4261469" y="2623901"/>
-            <a:ext cx="637519" cy="357011"/>
-          </a:xfrm>
-          <a:prstGeom prst="rect">
-            <a:avLst/>
-          </a:prstGeom>
-          <a:noFill/>
-        </p:spPr>
-        <p:txBody>
-          <a:bodyPr wrap="square">
-            <a:spAutoFit/>
-          </a:bodyPr>
-          <a:lstStyle/>
-          <a:p>
-            <a:pPr algn="ctr"/>
-            <a:r>
-              <a:rPr sz="1800" b="1" i="0">
-                <a:solidFill>
-                  <a:srgbClr val="FFFFFF"/>
-                </a:solidFill>
-                <a:latin typeface="DM Sans"/>
-              </a:rPr>
-              <a:t>60%</a:t>
-            </a:r>
-          </a:p>
-        </p:txBody>
-      </p:sp>
-      <p:sp>
-        <p:nvSpPr>
-          <p:cNvPr id="10" name="Oval 9"/>
-          <p:cNvSpPr/>
-          <p:nvPr/>
-        </p:nvSpPr>
-        <p:spPr>
-          <a:xfrm>
-            <a:off x="4566422" y="3280547"/>
-            <a:ext cx="637519" cy="637519"/>
-          </a:xfrm>
-          <a:prstGeom prst="ellipse">
-            <a:avLst/>
-          </a:prstGeom>
-          <a:solidFill>
-            <a:srgbClr val="00BDBB"/>
-          </a:solidFill>
-          <a:ln>
-            <a:noFill/>
-          </a:ln>
-        </p:spPr>
-        <p:style>
-          <a:lnRef idx="1">
-            <a:schemeClr val="accent1"/>
-          </a:lnRef>
-          <a:fillRef idx="3">
-            <a:schemeClr val="accent1"/>
-          </a:fillRef>
-          <a:effectRef idx="2">
-            <a:schemeClr val="accent1"/>
-          </a:effectRef>
-          <a:fontRef idx="minor">
-            <a:schemeClr val="lt1"/>
-          </a:fontRef>
-        </p:style>
-        <p:txBody>
-          <a:bodyPr rtlCol="0" anchor="ctr"/>
-          <a:lstStyle/>
-          <a:p>
-            <a:pPr algn="ctr"/>
-          </a:p>
-        </p:txBody>
-      </p:sp>
-      <p:sp>
-        <p:nvSpPr>
-          <p:cNvPr id="11" name="TextBox 10"/>
-          <p:cNvSpPr txBox="1"/>
-          <p:nvPr/>
-        </p:nvSpPr>
-        <p:spPr>
-          <a:xfrm>
-            <a:off x="4566422" y="3420801"/>
-            <a:ext cx="637519" cy="357011"/>
-          </a:xfrm>
-          <a:prstGeom prst="rect">
-            <a:avLst/>
-          </a:prstGeom>
-          <a:noFill/>
-        </p:spPr>
-        <p:txBody>
-          <a:bodyPr wrap="square">
-            <a:spAutoFit/>
-          </a:bodyPr>
-          <a:lstStyle/>
-          <a:p>
-            <a:pPr algn="ctr"/>
-            <a:r>
-              <a:rPr sz="1800" b="1" i="0">
-                <a:solidFill>
-                  <a:srgbClr val="FFFFFF"/>
-                </a:solidFill>
-                <a:latin typeface="DM Sans"/>
-              </a:rPr>
-              <a:t>70%</a:t>
-            </a:r>
-          </a:p>
-        </p:txBody>
-      </p:sp>
-      <p:pic>
-        <p:nvPicPr>
-          <p:cNvPr id="12" name="Picture 11" descr="image.png"/>
-          <p:cNvPicPr>
-            <a:picLocks noChangeAspect="1"/>
-          </p:cNvPicPr>
-          <p:nvPr/>
-        </p:nvPicPr>
-        <p:blipFill>
-          <a:blip r:embed="rId3"/>
-          <a:stretch>
-            <a:fillRect/>
-          </a:stretch>
-        </p:blipFill>
-        <p:spPr>
-          <a:xfrm>
-            <a:off x="310896" y="4416552"/>
-            <a:ext cx="6099048" cy="274320"/>
-          </a:xfrm>
-          <a:prstGeom prst="rect">
-            <a:avLst/>
-          </a:prstGeom>
-        </p:spPr>
-      </p:pic>
-      <p:sp>
-        <p:nvSpPr>
-          <p:cNvPr id="13" name="TextBox 12"/>
-          <p:cNvSpPr txBox="1"/>
-          <p:nvPr/>
-        </p:nvSpPr>
-        <p:spPr>
-          <a:xfrm>
-            <a:off x="7068312" y="1463040"/>
-            <a:ext cx="4754879" cy="2880360"/>
-          </a:xfrm>
-          <a:prstGeom prst="rect">
-            <a:avLst/>
-          </a:prstGeom>
-          <a:noFill/>
-        </p:spPr>
-        <p:txBody>
-          <a:bodyPr wrap="square">
-            <a:spAutoFit/>
-          </a:bodyPr>
-          <a:lstStyle/>
-          <a:p>
-            <a:r>
-              <a:rPr sz="1000" b="0">
-                <a:solidFill>
-                  <a:srgbClr val="44546A"/>
-                </a:solidFill>
-                <a:latin typeface="DM Sans"/>
-              </a:rPr>
-              <a:t>Total agree by statement:</a:t>
-            </a:r>
-          </a:p>
-          <a:p>
-            <a:r>
-              <a:rPr sz="1000" b="0">
-                <a:solidFill>
-                  <a:srgbClr val="44546A"/>
-                </a:solidFill>
-                <a:latin typeface="DM Sans"/>
-              </a:rPr>
-              <a:t>– Community impact:   XX%</a:t>
-            </a:r>
-          </a:p>
-          <a:p>
-            <a:r>
-              <a:rPr sz="1000" b="0">
-                <a:solidFill>
-                  <a:srgbClr val="44546A"/>
-                </a:solidFill>
-                <a:latin typeface="DM Sans"/>
-              </a:rPr>
-              <a:t>– Govt leadership:    XX%</a:t>
-            </a:r>
-          </a:p>
-          <a:p>
-            <a:r>
-              <a:rPr sz="1000" b="0">
-                <a:solidFill>
-                  <a:srgbClr val="44546A"/>
-                </a:solidFill>
-                <a:latin typeface="DM Sans"/>
-              </a:rPr>
-              <a:t>– Local action:       XX%</a:t>
-            </a:r>
-          </a:p>
-          <a:p>
-            <a:r>
-              <a:rPr sz="1000" b="0">
-                <a:solidFill>
-                  <a:srgbClr val="44546A"/>
-                </a:solidFill>
-                <a:latin typeface="DM Sans"/>
-              </a:rPr>
-              <a:t/>
-            </a:r>
-          </a:p>
-          <a:p>
-            <a:r>
-              <a:rPr sz="1000" b="0">
-                <a:solidFill>
-                  <a:srgbClr val="44546A"/>
-                </a:solidFill>
-                <a:latin typeface="DM Sans"/>
-              </a:rPr>
-              <a:t>Agreement is broadly consistent</a:t>
-            </a:r>
-          </a:p>
-          <a:p>
-            <a:r>
-              <a:rPr sz="1000" b="0">
-                <a:solidFill>
-                  <a:srgbClr val="44546A"/>
-                </a:solidFill>
-                <a:latin typeface="DM Sans"/>
-              </a:rPr>
-              <a:t>across age groups and regions.</a:t>
-            </a:r>
-          </a:p>
-        </p:txBody>
-      </p:sp>
-      <p:sp>
-        <p:nvSpPr>
-          <p:cNvPr id="14" name="TextBox 13"/>
-          <p:cNvSpPr txBox="1"/>
-          <p:nvPr/>
-        </p:nvSpPr>
-        <p:spPr>
-          <a:xfrm>
-            <a:off x="1097280" y="6236208"/>
-            <a:ext cx="10058400" cy="256032"/>
-          </a:xfrm>
-          <a:prstGeom prst="rect">
-            <a:avLst/>
-          </a:prstGeom>
-          <a:noFill/>
-        </p:spPr>
-        <p:txBody>
-          <a:bodyPr wrap="square">
-            <a:spAutoFit/>
-          </a:bodyPr>
-          <a:lstStyle/>
-          <a:p>
-            <a:pPr algn="l"/>
-            <a:r>
-              <a:rPr sz="800" b="0" i="1">
-                <a:solidFill>
-                  <a:srgbClr val="44546A"/>
-                </a:solidFill>
-                <a:latin typeface="DM Sans"/>
-              </a:rPr>
-              <a:t>Base: all respondents (n=200)</a:t>
-            </a:r>
-          </a:p>
-        </p:txBody>
-      </p:sp>
-      <p:sp>
-        <p:nvSpPr>
-          <p:cNvPr id="15" name="Oval 14"/>
-          <p:cNvSpPr/>
-          <p:nvPr/>
-        </p:nvSpPr>
-        <p:spPr>
-          <a:xfrm>
-            <a:off x="11548872" y="6217920"/>
-            <a:ext cx="274320" cy="274320"/>
-          </a:xfrm>
-          <a:prstGeom prst="ellipse">
-            <a:avLst/>
-          </a:prstGeom>
-          <a:solidFill>
-            <a:srgbClr val="027F7C"/>
-          </a:solidFill>
-          <a:ln>
-            <a:noFill/>
-          </a:ln>
-        </p:spPr>
-        <p:style>
-          <a:lnRef idx="1">
-            <a:schemeClr val="accent1"/>
-          </a:lnRef>
-          <a:fillRef idx="3">
-            <a:schemeClr val="accent1"/>
-          </a:fillRef>
-          <a:effectRef idx="2">
-            <a:schemeClr val="accent1"/>
-          </a:effectRef>
-          <a:fontRef idx="minor">
-            <a:schemeClr val="lt1"/>
-          </a:fontRef>
-        </p:style>
-        <p:txBody>
-          <a:bodyPr rtlCol="0" anchor="ctr"/>
-          <a:lstStyle/>
-          <a:p>
-            <a:pPr algn="ctr"/>
-          </a:p>
-        </p:txBody>
-      </p:sp>
-      <p:sp>
-        <p:nvSpPr>
-          <p:cNvPr id="16" name="TextBox 15"/>
+          <p:cNvPr id="10" name="TextBox 9"/>
           <p:cNvSpPr txBox="1"/>
           <p:nvPr/>
         </p:nvSpPr>

--- a/sample_data/output_new.pptx
+++ b/sample_data/output_new.pptx
@@ -6962,14 +6962,119 @@
       <p:grpSpPr/>
       <p:sp>
         <p:nvSpPr>
-          <p:cNvPr id="2" name="TextBox 1"/>
+          <p:cNvPr id="2" name="Text Placeholder 1"/>
+          <p:cNvSpPr>
+            <a:spLocks noGrp="1"/>
+          </p:cNvSpPr>
+          <p:nvPr>
+            <p:ph type="body" idx="22" sz="quarter"/>
+          </p:nvPr>
+        </p:nvSpPr>
+        <p:spPr/>
+        <p:txBody>
+          <a:bodyPr wrap="square"/>
+          <a:lstStyle/>
+          <a:p>
+            <a:r>
+              <a:rPr sz="800" i="1">
+                <a:solidFill>
+                  <a:srgbClr val="44546A"/>
+                </a:solidFill>
+                <a:latin typeface="DM Sans"/>
+              </a:rPr>
+              <a:t>Base: all respondents (n=200)</a:t>
+            </a:r>
+          </a:p>
+        </p:txBody>
+      </p:sp>
+      <p:sp>
+        <p:nvSpPr>
+          <p:cNvPr id="3" name="Title 2"/>
+          <p:cNvSpPr>
+            <a:spLocks noGrp="1"/>
+          </p:cNvSpPr>
+          <p:nvPr>
+            <p:ph type="title"/>
+          </p:nvPr>
+        </p:nvSpPr>
+        <p:spPr/>
+        <p:txBody>
+          <a:bodyPr wrap="square"/>
+          <a:lstStyle/>
+          <a:p>
+            <a:r>
+              <a:rPr sz="1800" b="1">
+                <a:solidFill>
+                  <a:srgbClr val="027F7C"/>
+                </a:solidFill>
+                <a:latin typeface="DM Sans"/>
+              </a:rPr>
+              <a:t>Respondent age group</a:t>
+            </a:r>
+          </a:p>
+        </p:txBody>
+      </p:sp>
+      <p:sp>
+        <p:nvSpPr>
+          <p:cNvPr id="4" name="Text Placeholder 3"/>
+          <p:cNvSpPr>
+            <a:spLocks noGrp="1"/>
+          </p:cNvSpPr>
+          <p:nvPr>
+            <p:ph type="body" idx="21" sz="quarter"/>
+          </p:nvPr>
+        </p:nvSpPr>
+        <p:spPr/>
+        <p:txBody>
+          <a:bodyPr wrap="square"/>
+          <a:lstStyle/>
+          <a:p>
+            <a:r>
+              <a:rPr sz="1100" i="1">
+                <a:solidFill>
+                  <a:srgbClr val="44546A"/>
+                </a:solidFill>
+                <a:latin typeface="DM Sans"/>
+              </a:rPr>
+              <a:t>What is your age group? (%)</a:t>
+            </a:r>
+          </a:p>
+        </p:txBody>
+      </p:sp>
+      <p:pic>
+        <p:nvPicPr>
+          <p:cNvPr id="5" name="Picture 4" descr="image.png"/>
+          <p:cNvPicPr>
+            <a:picLocks noChangeAspect="1"/>
+          </p:cNvPicPr>
+          <p:nvPr/>
+        </p:nvPicPr>
+        <p:blipFill>
+          <a:blip r:embed="rId2"/>
+          <a:stretch>
+            <a:fillRect/>
+          </a:stretch>
+        </p:blipFill>
+        <p:spPr>
+          <a:xfrm>
+            <a:off x="310896" y="1709928"/>
+            <a:ext cx="6611112" cy="4251960"/>
+          </a:xfrm>
+          <a:prstGeom prst="rect">
+            <a:avLst/>
+          </a:prstGeom>
+        </p:spPr>
+      </p:pic>
+      <p:sp>
+        <p:nvSpPr>
+          <p:cNvPr id="6" name="TextBox 5"/>
           <p:cNvSpPr txBox="1"/>
           <p:nvPr/>
         </p:nvSpPr>
         <p:spPr>
           <a:xfrm>
-            <a:off x="310896" y="201168"/>
-            <a:ext cx="11567160" cy="749808"/>
+            <a:off x="7379208" y="1709928"/>
+            <a:ext cx="4443983" cy="4251960"/>
           </a:xfrm>
           <a:prstGeom prst="rect">
             <a:avLst/>
@@ -6982,31 +7087,41 @@
           </a:bodyPr>
           <a:lstStyle/>
           <a:p>
-            <a:pPr algn="l"/>
-            <a:r>
-              <a:rPr sz="1800" b="1" i="0">
-                <a:solidFill>
-                  <a:srgbClr val="027F7C"/>
+            <a:r>
+              <a:rPr sz="1000" b="0">
+                <a:solidFill>
+                  <a:srgbClr val="44546A"/>
                 </a:solidFill>
                 <a:latin typeface="DM Sans"/>
               </a:rPr>
-              <a:t>Respondent age group</a:t>
-            </a:r>
-          </a:p>
-        </p:txBody>
-      </p:sp>
-      <p:sp>
-        <p:nvSpPr>
-          <p:cNvPr id="3" name="Rectangle 2"/>
+              <a:t>Sample skews slightly toward working-age</a:t>
+            </a:r>
+          </a:p>
+          <a:p>
+            <a:r>
+              <a:rPr sz="1000" b="0">
+                <a:solidFill>
+                  <a:srgbClr val="44546A"/>
+                </a:solidFill>
+                <a:latin typeface="DM Sans"/>
+              </a:rPr>
+              <a:t>adults (35–54).</a:t>
+            </a:r>
+          </a:p>
+        </p:txBody>
+      </p:sp>
+      <p:sp>
+        <p:nvSpPr>
+          <p:cNvPr id="7" name="Oval 6"/>
           <p:cNvSpPr/>
           <p:nvPr/>
         </p:nvSpPr>
         <p:spPr>
           <a:xfrm>
-            <a:off x="310896" y="1005840"/>
-            <a:ext cx="11878056" cy="27432"/>
-          </a:xfrm>
-          <a:prstGeom prst="rect">
+            <a:off x="11548872" y="6217920"/>
+            <a:ext cx="274320" cy="274320"/>
+          </a:xfrm>
+          <a:prstGeom prst="ellipse">
             <a:avLst/>
           </a:prstGeom>
           <a:solidFill>
@@ -7040,189 +7155,7 @@
       </p:sp>
       <p:sp>
         <p:nvSpPr>
-          <p:cNvPr id="4" name="TextBox 3"/>
-          <p:cNvSpPr txBox="1"/>
-          <p:nvPr/>
-        </p:nvSpPr>
-        <p:spPr>
-          <a:xfrm>
-            <a:off x="310896" y="1042415"/>
-            <a:ext cx="8229600" cy="347472"/>
-          </a:xfrm>
-          <a:prstGeom prst="rect">
-            <a:avLst/>
-          </a:prstGeom>
-          <a:noFill/>
-        </p:spPr>
-        <p:txBody>
-          <a:bodyPr wrap="square">
-            <a:spAutoFit/>
-          </a:bodyPr>
-          <a:lstStyle/>
-          <a:p>
-            <a:pPr algn="l"/>
-            <a:r>
-              <a:rPr sz="1100" b="0" i="1">
-                <a:solidFill>
-                  <a:srgbClr val="44546A"/>
-                </a:solidFill>
-                <a:latin typeface="DM Sans"/>
-              </a:rPr>
-              <a:t>What is your age group? (%)</a:t>
-            </a:r>
-          </a:p>
-        </p:txBody>
-      </p:sp>
-      <p:pic>
-        <p:nvPicPr>
-          <p:cNvPr id="5" name="Picture 4" descr="image.png"/>
-          <p:cNvPicPr>
-            <a:picLocks noChangeAspect="1"/>
-          </p:cNvPicPr>
-          <p:nvPr/>
-        </p:nvPicPr>
-        <p:blipFill>
-          <a:blip r:embed="rId2"/>
-          <a:stretch>
-            <a:fillRect/>
-          </a:stretch>
-        </p:blipFill>
-        <p:spPr>
-          <a:xfrm>
-            <a:off x="310896" y="1463040"/>
-            <a:ext cx="6702552" cy="4251960"/>
-          </a:xfrm>
-          <a:prstGeom prst="rect">
-            <a:avLst/>
-          </a:prstGeom>
-        </p:spPr>
-      </p:pic>
-      <p:sp>
-        <p:nvSpPr>
-          <p:cNvPr id="6" name="TextBox 5"/>
-          <p:cNvSpPr txBox="1"/>
-          <p:nvPr/>
-        </p:nvSpPr>
-        <p:spPr>
-          <a:xfrm>
-            <a:off x="7434072" y="1463040"/>
-            <a:ext cx="4389119" cy="4251960"/>
-          </a:xfrm>
-          <a:prstGeom prst="rect">
-            <a:avLst/>
-          </a:prstGeom>
-          <a:noFill/>
-        </p:spPr>
-        <p:txBody>
-          <a:bodyPr wrap="square">
-            <a:spAutoFit/>
-          </a:bodyPr>
-          <a:lstStyle/>
-          <a:p>
-            <a:r>
-              <a:rPr sz="1000" b="0">
-                <a:solidFill>
-                  <a:srgbClr val="44546A"/>
-                </a:solidFill>
-                <a:latin typeface="DM Sans"/>
-              </a:rPr>
-              <a:t>Sample skews slightly toward working-age</a:t>
-            </a:r>
-          </a:p>
-          <a:p>
-            <a:r>
-              <a:rPr sz="1000" b="0">
-                <a:solidFill>
-                  <a:srgbClr val="44546A"/>
-                </a:solidFill>
-                <a:latin typeface="DM Sans"/>
-              </a:rPr>
-              <a:t>adults (35–54).</a:t>
-            </a:r>
-          </a:p>
-        </p:txBody>
-      </p:sp>
-      <p:sp>
-        <p:nvSpPr>
-          <p:cNvPr id="7" name="TextBox 6"/>
-          <p:cNvSpPr txBox="1"/>
-          <p:nvPr/>
-        </p:nvSpPr>
-        <p:spPr>
-          <a:xfrm>
-            <a:off x="1097280" y="6236208"/>
-            <a:ext cx="10058400" cy="256032"/>
-          </a:xfrm>
-          <a:prstGeom prst="rect">
-            <a:avLst/>
-          </a:prstGeom>
-          <a:noFill/>
-        </p:spPr>
-        <p:txBody>
-          <a:bodyPr wrap="square">
-            <a:spAutoFit/>
-          </a:bodyPr>
-          <a:lstStyle/>
-          <a:p>
-            <a:pPr algn="l"/>
-            <a:r>
-              <a:rPr sz="800" b="0" i="1">
-                <a:solidFill>
-                  <a:srgbClr val="44546A"/>
-                </a:solidFill>
-                <a:latin typeface="DM Sans"/>
-              </a:rPr>
-              <a:t>Base: all respondents (n=200)</a:t>
-            </a:r>
-          </a:p>
-        </p:txBody>
-      </p:sp>
-      <p:sp>
-        <p:nvSpPr>
-          <p:cNvPr id="8" name="Oval 7"/>
-          <p:cNvSpPr/>
-          <p:nvPr/>
-        </p:nvSpPr>
-        <p:spPr>
-          <a:xfrm>
-            <a:off x="11548872" y="6217920"/>
-            <a:ext cx="274320" cy="274320"/>
-          </a:xfrm>
-          <a:prstGeom prst="ellipse">
-            <a:avLst/>
-          </a:prstGeom>
-          <a:solidFill>
-            <a:srgbClr val="027F7C"/>
-          </a:solidFill>
-          <a:ln>
-            <a:noFill/>
-          </a:ln>
-        </p:spPr>
-        <p:style>
-          <a:lnRef idx="1">
-            <a:schemeClr val="accent1"/>
-          </a:lnRef>
-          <a:fillRef idx="3">
-            <a:schemeClr val="accent1"/>
-          </a:fillRef>
-          <a:effectRef idx="2">
-            <a:schemeClr val="accent1"/>
-          </a:effectRef>
-          <a:fontRef idx="minor">
-            <a:schemeClr val="lt1"/>
-          </a:fontRef>
-        </p:style>
-        <p:txBody>
-          <a:bodyPr rtlCol="0" anchor="ctr"/>
-          <a:lstStyle/>
-          <a:p>
-            <a:pPr algn="ctr"/>
-          </a:p>
-        </p:txBody>
-      </p:sp>
-      <p:sp>
-        <p:nvSpPr>
-          <p:cNvPr id="9" name="TextBox 8"/>
+          <p:cNvPr id="8" name="TextBox 7"/>
           <p:cNvSpPr txBox="1"/>
           <p:nvPr/>
         </p:nvSpPr>
@@ -7659,29 +7592,48 @@
       <p:grpSpPr/>
       <p:sp>
         <p:nvSpPr>
-          <p:cNvPr id="2" name="TextBox 1"/>
-          <p:cNvSpPr txBox="1"/>
-          <p:nvPr/>
-        </p:nvSpPr>
-        <p:spPr>
-          <a:xfrm>
-            <a:off x="310896" y="201168"/>
-            <a:ext cx="11567160" cy="749808"/>
-          </a:xfrm>
-          <a:prstGeom prst="rect">
-            <a:avLst/>
-          </a:prstGeom>
-          <a:noFill/>
-        </p:spPr>
-        <p:txBody>
-          <a:bodyPr wrap="square">
-            <a:spAutoFit/>
-          </a:bodyPr>
+          <p:cNvPr id="2" name="Text Placeholder 1"/>
+          <p:cNvSpPr>
+            <a:spLocks noGrp="1"/>
+          </p:cNvSpPr>
+          <p:nvPr>
+            <p:ph type="body" idx="22" sz="quarter"/>
+          </p:nvPr>
+        </p:nvSpPr>
+        <p:spPr/>
+        <p:txBody>
+          <a:bodyPr wrap="square"/>
           <a:lstStyle/>
           <a:p>
-            <a:pPr algn="l"/>
-            <a:r>
-              <a:rPr sz="1800" b="1" i="0">
+            <a:r>
+              <a:rPr sz="800" i="1">
+                <a:solidFill>
+                  <a:srgbClr val="44546A"/>
+                </a:solidFill>
+                <a:latin typeface="DM Sans"/>
+              </a:rPr>
+              <a:t>Base: all respondents (n=200)</a:t>
+            </a:r>
+          </a:p>
+        </p:txBody>
+      </p:sp>
+      <p:sp>
+        <p:nvSpPr>
+          <p:cNvPr id="3" name="Title 2"/>
+          <p:cNvSpPr>
+            <a:spLocks noGrp="1"/>
+          </p:cNvSpPr>
+          <p:nvPr>
+            <p:ph type="title"/>
+          </p:nvPr>
+        </p:nvSpPr>
+        <p:spPr/>
+        <p:txBody>
+          <a:bodyPr wrap="square"/>
+          <a:lstStyle/>
+          <a:p>
+            <a:r>
+              <a:rPr sz="1800" b="1">
                 <a:solidFill>
                   <a:srgbClr val="027F7C"/>
                 </a:solidFill>
@@ -7694,20 +7646,71 @@
       </p:sp>
       <p:sp>
         <p:nvSpPr>
-          <p:cNvPr id="3" name="Rectangle 2"/>
+          <p:cNvPr id="4" name="Text Placeholder 3"/>
+          <p:cNvSpPr>
+            <a:spLocks noGrp="1"/>
+          </p:cNvSpPr>
+          <p:nvPr>
+            <p:ph type="body" idx="21" sz="quarter"/>
+          </p:nvPr>
+        </p:nvSpPr>
+        <p:spPr/>
+        <p:txBody>
+          <a:bodyPr wrap="square"/>
+          <a:lstStyle/>
+          <a:p>
+            <a:r>
+              <a:rPr sz="1100" i="1">
+                <a:solidFill>
+                  <a:srgbClr val="44546A"/>
+                </a:solidFill>
+                <a:latin typeface="DM Sans"/>
+              </a:rPr>
+              <a:t>How concerned are you about this issue in your community? (%)</a:t>
+            </a:r>
+          </a:p>
+        </p:txBody>
+      </p:sp>
+      <p:pic>
+        <p:nvPicPr>
+          <p:cNvPr id="5" name="Picture 4" descr="image.png"/>
+          <p:cNvPicPr>
+            <a:picLocks noChangeAspect="1"/>
+          </p:cNvPicPr>
+          <p:nvPr/>
+        </p:nvPicPr>
+        <p:blipFill>
+          <a:blip r:embed="rId2"/>
+          <a:stretch>
+            <a:fillRect/>
+          </a:stretch>
+        </p:blipFill>
+        <p:spPr>
+          <a:xfrm>
+            <a:off x="310896" y="1709928"/>
+            <a:ext cx="6611112" cy="4251960"/>
+          </a:xfrm>
+          <a:prstGeom prst="rect">
+            <a:avLst/>
+          </a:prstGeom>
+        </p:spPr>
+      </p:pic>
+      <p:sp>
+        <p:nvSpPr>
+          <p:cNvPr id="6" name="Oval 5"/>
           <p:cNvSpPr/>
           <p:nvPr/>
         </p:nvSpPr>
         <p:spPr>
           <a:xfrm>
-            <a:off x="310896" y="1005840"/>
-            <a:ext cx="11878056" cy="27432"/>
-          </a:xfrm>
-          <a:prstGeom prst="rect">
+            <a:off x="6128308" y="2137958"/>
+            <a:ext cx="1133856" cy="1133856"/>
+          </a:xfrm>
+          <a:prstGeom prst="ellipse">
             <a:avLst/>
           </a:prstGeom>
           <a:solidFill>
-            <a:srgbClr val="027F7C"/>
+            <a:srgbClr val="00BDBB"/>
           </a:solidFill>
           <a:ln>
             <a:noFill/>
@@ -7737,14 +7740,14 @@
       </p:sp>
       <p:sp>
         <p:nvSpPr>
-          <p:cNvPr id="4" name="TextBox 3"/>
+          <p:cNvPr id="7" name="TextBox 6"/>
           <p:cNvSpPr txBox="1"/>
           <p:nvPr/>
         </p:nvSpPr>
         <p:spPr>
           <a:xfrm>
-            <a:off x="310896" y="1042415"/>
-            <a:ext cx="8229600" cy="347472"/>
+            <a:off x="6128308" y="2251344"/>
+            <a:ext cx="1133856" cy="589605"/>
           </a:xfrm>
           <a:prstGeom prst="rect">
             <a:avLst/>
@@ -7757,59 +7760,70 @@
           </a:bodyPr>
           <a:lstStyle/>
           <a:p>
-            <a:pPr algn="l"/>
-            <a:r>
-              <a:rPr sz="1100" b="0" i="1">
-                <a:solidFill>
-                  <a:srgbClr val="44546A"/>
+            <a:pPr algn="ctr"/>
+            <a:r>
+              <a:rPr sz="3200" b="1" i="0">
+                <a:solidFill>
+                  <a:srgbClr val="FFFFFF"/>
                 </a:solidFill>
                 <a:latin typeface="DM Sans"/>
               </a:rPr>
-              <a:t>How concerned are you about this issue in your community? (%)</a:t>
-            </a:r>
-          </a:p>
-        </p:txBody>
-      </p:sp>
-      <p:pic>
-        <p:nvPicPr>
-          <p:cNvPr id="5" name="Picture 4" descr="image.png"/>
-          <p:cNvPicPr>
-            <a:picLocks noChangeAspect="1"/>
-          </p:cNvPicPr>
+              <a:t>60%</a:t>
+            </a:r>
+          </a:p>
+        </p:txBody>
+      </p:sp>
+      <p:sp>
+        <p:nvSpPr>
+          <p:cNvPr id="8" name="TextBox 7"/>
+          <p:cNvSpPr txBox="1"/>
           <p:nvPr/>
-        </p:nvPicPr>
-        <p:blipFill>
-          <a:blip r:embed="rId2"/>
-          <a:stretch>
-            <a:fillRect/>
-          </a:stretch>
-        </p:blipFill>
-        <p:spPr>
-          <a:xfrm>
-            <a:off x="310896" y="1463040"/>
-            <a:ext cx="6702552" cy="4251960"/>
-          </a:xfrm>
-          <a:prstGeom prst="rect">
-            <a:avLst/>
-          </a:prstGeom>
-        </p:spPr>
-      </p:pic>
-      <p:sp>
-        <p:nvSpPr>
-          <p:cNvPr id="6" name="Oval 5"/>
+        </p:nvSpPr>
+        <p:spPr>
+          <a:xfrm>
+            <a:off x="6128308" y="2795595"/>
+            <a:ext cx="1133856" cy="408188"/>
+          </a:xfrm>
+          <a:prstGeom prst="rect">
+            <a:avLst/>
+          </a:prstGeom>
+          <a:noFill/>
+        </p:spPr>
+        <p:txBody>
+          <a:bodyPr wrap="square">
+            <a:spAutoFit/>
+          </a:bodyPr>
+          <a:lstStyle/>
+          <a:p>
+            <a:pPr algn="ctr"/>
+            <a:r>
+              <a:rPr sz="1700" b="0" i="0">
+                <a:solidFill>
+                  <a:srgbClr val="FFFFFF"/>
+                </a:solidFill>
+                <a:latin typeface="DM Sans"/>
+              </a:rPr>
+              <a:t>Concerned</a:t>
+            </a:r>
+          </a:p>
+        </p:txBody>
+      </p:sp>
+      <p:sp>
+        <p:nvSpPr>
+          <p:cNvPr id="9" name="Oval 8"/>
           <p:cNvSpPr/>
           <p:nvPr/>
         </p:nvSpPr>
         <p:spPr>
           <a:xfrm>
-            <a:off x="6219748" y="1891070"/>
-            <a:ext cx="1133856" cy="1133856"/>
+            <a:off x="6213348" y="4570079"/>
+            <a:ext cx="963777" cy="963777"/>
           </a:xfrm>
           <a:prstGeom prst="ellipse">
             <a:avLst/>
           </a:prstGeom>
           <a:solidFill>
-            <a:srgbClr val="00BDBB"/>
+            <a:srgbClr val="A32015"/>
           </a:solidFill>
           <a:ln>
             <a:noFill/>
@@ -7839,14 +7853,14 @@
       </p:sp>
       <p:sp>
         <p:nvSpPr>
-          <p:cNvPr id="7" name="TextBox 6"/>
+          <p:cNvPr id="10" name="TextBox 9"/>
           <p:cNvSpPr txBox="1"/>
           <p:nvPr/>
         </p:nvSpPr>
         <p:spPr>
           <a:xfrm>
-            <a:off x="6219748" y="2004456"/>
-            <a:ext cx="1133856" cy="589605"/>
+            <a:off x="6213348" y="4666457"/>
+            <a:ext cx="963777" cy="501164"/>
           </a:xfrm>
           <a:prstGeom prst="rect">
             <a:avLst/>
@@ -7861,27 +7875,27 @@
           <a:p>
             <a:pPr algn="ctr"/>
             <a:r>
-              <a:rPr sz="3200" b="1" i="0">
+              <a:rPr sz="2700" b="1" i="0">
                 <a:solidFill>
                   <a:srgbClr val="FFFFFF"/>
                 </a:solidFill>
                 <a:latin typeface="DM Sans"/>
               </a:rPr>
-              <a:t>60%</a:t>
-            </a:r>
-          </a:p>
-        </p:txBody>
-      </p:sp>
-      <p:sp>
-        <p:nvSpPr>
-          <p:cNvPr id="8" name="TextBox 7"/>
+              <a:t>15%</a:t>
+            </a:r>
+          </a:p>
+        </p:txBody>
+      </p:sp>
+      <p:sp>
+        <p:nvSpPr>
+          <p:cNvPr id="11" name="TextBox 10"/>
           <p:cNvSpPr txBox="1"/>
           <p:nvPr/>
         </p:nvSpPr>
         <p:spPr>
           <a:xfrm>
-            <a:off x="6219748" y="2548707"/>
-            <a:ext cx="1133856" cy="408188"/>
+            <a:off x="6213348" y="5129070"/>
+            <a:ext cx="963777" cy="346959"/>
           </a:xfrm>
           <a:prstGeom prst="rect">
             <a:avLst/>
@@ -7896,33 +7910,177 @@
           <a:p>
             <a:pPr algn="ctr"/>
             <a:r>
-              <a:rPr sz="1700" b="0" i="0">
+              <a:rPr sz="1400" b="0" i="0">
                 <a:solidFill>
                   <a:srgbClr val="FFFFFF"/>
                 </a:solidFill>
                 <a:latin typeface="DM Sans"/>
               </a:rPr>
-              <a:t>Concerned</a:t>
-            </a:r>
-          </a:p>
-        </p:txBody>
-      </p:sp>
-      <p:sp>
-        <p:nvSpPr>
-          <p:cNvPr id="9" name="Oval 8"/>
+              <a:t>Not concerned</a:t>
+            </a:r>
+          </a:p>
+        </p:txBody>
+      </p:sp>
+      <p:sp>
+        <p:nvSpPr>
+          <p:cNvPr id="12" name="TextBox 11"/>
+          <p:cNvSpPr txBox="1"/>
+          <p:nvPr/>
+        </p:nvSpPr>
+        <p:spPr>
+          <a:xfrm>
+            <a:off x="7379208" y="1709928"/>
+            <a:ext cx="4443983" cy="4251960"/>
+          </a:xfrm>
+          <a:prstGeom prst="rect">
+            <a:avLst/>
+          </a:prstGeom>
+          <a:noFill/>
+        </p:spPr>
+        <p:txBody>
+          <a:bodyPr wrap="square">
+            <a:spAutoFit/>
+          </a:bodyPr>
+          <a:lstStyle/>
+          <a:p>
+            <a:r>
+              <a:rPr sz="1000" b="0">
+                <a:solidFill>
+                  <a:srgbClr val="44546A"/>
+                </a:solidFill>
+                <a:latin typeface="DM Sans"/>
+              </a:rPr>
+              <a:t>Concern by age group:</a:t>
+            </a:r>
+          </a:p>
+          <a:p>
+            <a:r>
+              <a:rPr sz="1000" b="0">
+                <a:solidFill>
+                  <a:srgbClr val="44546A"/>
+                </a:solidFill>
+                <a:latin typeface="DM Sans"/>
+              </a:rPr>
+              <a:t>– 18–24:   XX% very/extremely concerned</a:t>
+            </a:r>
+          </a:p>
+          <a:p>
+            <a:r>
+              <a:rPr sz="1000" b="0">
+                <a:solidFill>
+                  <a:srgbClr val="44546A"/>
+                </a:solidFill>
+                <a:latin typeface="DM Sans"/>
+              </a:rPr>
+              <a:t>– 25–34:   XX%</a:t>
+            </a:r>
+          </a:p>
+          <a:p>
+            <a:r>
+              <a:rPr sz="1000" b="0">
+                <a:solidFill>
+                  <a:srgbClr val="44546A"/>
+                </a:solidFill>
+                <a:latin typeface="DM Sans"/>
+              </a:rPr>
+              <a:t>– 35–44:   XX%</a:t>
+            </a:r>
+          </a:p>
+          <a:p>
+            <a:r>
+              <a:rPr sz="1000" b="0">
+                <a:solidFill>
+                  <a:srgbClr val="44546A"/>
+                </a:solidFill>
+                <a:latin typeface="DM Sans"/>
+              </a:rPr>
+              <a:t>– 45–54:   XX%</a:t>
+            </a:r>
+          </a:p>
+          <a:p>
+            <a:r>
+              <a:rPr sz="1000" b="0">
+                <a:solidFill>
+                  <a:srgbClr val="44546A"/>
+                </a:solidFill>
+                <a:latin typeface="DM Sans"/>
+              </a:rPr>
+              <a:t>– 55+:     XX%</a:t>
+            </a:r>
+          </a:p>
+          <a:p>
+            <a:r>
+              <a:rPr sz="1000" b="0">
+                <a:solidFill>
+                  <a:srgbClr val="44546A"/>
+                </a:solidFill>
+                <a:latin typeface="DM Sans"/>
+              </a:rPr>
+              <a:t/>
+            </a:r>
+          </a:p>
+          <a:p>
+            <a:r>
+              <a:rPr sz="1000" b="0">
+                <a:solidFill>
+                  <a:srgbClr val="44546A"/>
+                </a:solidFill>
+                <a:latin typeface="DM Sans"/>
+              </a:rPr>
+              <a:t>Concern by region:</a:t>
+            </a:r>
+          </a:p>
+          <a:p>
+            <a:r>
+              <a:rPr sz="1000" b="0">
+                <a:solidFill>
+                  <a:srgbClr val="44546A"/>
+                </a:solidFill>
+                <a:latin typeface="DM Sans"/>
+              </a:rPr>
+              <a:t>– Metro:      XX%</a:t>
+            </a:r>
+          </a:p>
+          <a:p>
+            <a:r>
+              <a:rPr sz="1000" b="0">
+                <a:solidFill>
+                  <a:srgbClr val="44546A"/>
+                </a:solidFill>
+                <a:latin typeface="DM Sans"/>
+              </a:rPr>
+              <a:t>– Regional:   XX%</a:t>
+            </a:r>
+          </a:p>
+          <a:p>
+            <a:r>
+              <a:rPr sz="1000" b="0">
+                <a:solidFill>
+                  <a:srgbClr val="44546A"/>
+                </a:solidFill>
+                <a:latin typeface="DM Sans"/>
+              </a:rPr>
+              <a:t>– Rural:      XX%</a:t>
+            </a:r>
+          </a:p>
+        </p:txBody>
+      </p:sp>
+      <p:sp>
+        <p:nvSpPr>
+          <p:cNvPr id="13" name="Oval 12"/>
           <p:cNvSpPr/>
           <p:nvPr/>
         </p:nvSpPr>
         <p:spPr>
           <a:xfrm>
-            <a:off x="6304788" y="4323191"/>
-            <a:ext cx="963777" cy="963777"/>
+            <a:off x="11548872" y="6217920"/>
+            <a:ext cx="274320" cy="274320"/>
           </a:xfrm>
           <a:prstGeom prst="ellipse">
             <a:avLst/>
           </a:prstGeom>
           <a:solidFill>
-            <a:srgbClr val="A32015"/>
+            <a:srgbClr val="027F7C"/>
           </a:solidFill>
           <a:ln>
             <a:noFill/>
@@ -7952,299 +8110,7 @@
       </p:sp>
       <p:sp>
         <p:nvSpPr>
-          <p:cNvPr id="10" name="TextBox 9"/>
-          <p:cNvSpPr txBox="1"/>
-          <p:nvPr/>
-        </p:nvSpPr>
-        <p:spPr>
-          <a:xfrm>
-            <a:off x="6304788" y="4419569"/>
-            <a:ext cx="963777" cy="501164"/>
-          </a:xfrm>
-          <a:prstGeom prst="rect">
-            <a:avLst/>
-          </a:prstGeom>
-          <a:noFill/>
-        </p:spPr>
-        <p:txBody>
-          <a:bodyPr wrap="square">
-            <a:spAutoFit/>
-          </a:bodyPr>
-          <a:lstStyle/>
-          <a:p>
-            <a:pPr algn="ctr"/>
-            <a:r>
-              <a:rPr sz="2700" b="1" i="0">
-                <a:solidFill>
-                  <a:srgbClr val="FFFFFF"/>
-                </a:solidFill>
-                <a:latin typeface="DM Sans"/>
-              </a:rPr>
-              <a:t>15%</a:t>
-            </a:r>
-          </a:p>
-        </p:txBody>
-      </p:sp>
-      <p:sp>
-        <p:nvSpPr>
-          <p:cNvPr id="11" name="TextBox 10"/>
-          <p:cNvSpPr txBox="1"/>
-          <p:nvPr/>
-        </p:nvSpPr>
-        <p:spPr>
-          <a:xfrm>
-            <a:off x="6304788" y="4882182"/>
-            <a:ext cx="963777" cy="346959"/>
-          </a:xfrm>
-          <a:prstGeom prst="rect">
-            <a:avLst/>
-          </a:prstGeom>
-          <a:noFill/>
-        </p:spPr>
-        <p:txBody>
-          <a:bodyPr wrap="square">
-            <a:spAutoFit/>
-          </a:bodyPr>
-          <a:lstStyle/>
-          <a:p>
-            <a:pPr algn="ctr"/>
-            <a:r>
-              <a:rPr sz="1400" b="0" i="0">
-                <a:solidFill>
-                  <a:srgbClr val="FFFFFF"/>
-                </a:solidFill>
-                <a:latin typeface="DM Sans"/>
-              </a:rPr>
-              <a:t>Not concerned</a:t>
-            </a:r>
-          </a:p>
-        </p:txBody>
-      </p:sp>
-      <p:sp>
-        <p:nvSpPr>
-          <p:cNvPr id="12" name="TextBox 11"/>
-          <p:cNvSpPr txBox="1"/>
-          <p:nvPr/>
-        </p:nvSpPr>
-        <p:spPr>
-          <a:xfrm>
-            <a:off x="7434072" y="1463040"/>
-            <a:ext cx="4389119" cy="4251960"/>
-          </a:xfrm>
-          <a:prstGeom prst="rect">
-            <a:avLst/>
-          </a:prstGeom>
-          <a:noFill/>
-        </p:spPr>
-        <p:txBody>
-          <a:bodyPr wrap="square">
-            <a:spAutoFit/>
-          </a:bodyPr>
-          <a:lstStyle/>
-          <a:p>
-            <a:r>
-              <a:rPr sz="1000" b="0">
-                <a:solidFill>
-                  <a:srgbClr val="44546A"/>
-                </a:solidFill>
-                <a:latin typeface="DM Sans"/>
-              </a:rPr>
-              <a:t>Concern by age group:</a:t>
-            </a:r>
-          </a:p>
-          <a:p>
-            <a:r>
-              <a:rPr sz="1000" b="0">
-                <a:solidFill>
-                  <a:srgbClr val="44546A"/>
-                </a:solidFill>
-                <a:latin typeface="DM Sans"/>
-              </a:rPr>
-              <a:t>– 18–24:   XX% very/extremely concerned</a:t>
-            </a:r>
-          </a:p>
-          <a:p>
-            <a:r>
-              <a:rPr sz="1000" b="0">
-                <a:solidFill>
-                  <a:srgbClr val="44546A"/>
-                </a:solidFill>
-                <a:latin typeface="DM Sans"/>
-              </a:rPr>
-              <a:t>– 25–34:   XX%</a:t>
-            </a:r>
-          </a:p>
-          <a:p>
-            <a:r>
-              <a:rPr sz="1000" b="0">
-                <a:solidFill>
-                  <a:srgbClr val="44546A"/>
-                </a:solidFill>
-                <a:latin typeface="DM Sans"/>
-              </a:rPr>
-              <a:t>– 35–44:   XX%</a:t>
-            </a:r>
-          </a:p>
-          <a:p>
-            <a:r>
-              <a:rPr sz="1000" b="0">
-                <a:solidFill>
-                  <a:srgbClr val="44546A"/>
-                </a:solidFill>
-                <a:latin typeface="DM Sans"/>
-              </a:rPr>
-              <a:t>– 45–54:   XX%</a:t>
-            </a:r>
-          </a:p>
-          <a:p>
-            <a:r>
-              <a:rPr sz="1000" b="0">
-                <a:solidFill>
-                  <a:srgbClr val="44546A"/>
-                </a:solidFill>
-                <a:latin typeface="DM Sans"/>
-              </a:rPr>
-              <a:t>– 55+:     XX%</a:t>
-            </a:r>
-          </a:p>
-          <a:p>
-            <a:r>
-              <a:rPr sz="1000" b="0">
-                <a:solidFill>
-                  <a:srgbClr val="44546A"/>
-                </a:solidFill>
-                <a:latin typeface="DM Sans"/>
-              </a:rPr>
-              <a:t/>
-            </a:r>
-          </a:p>
-          <a:p>
-            <a:r>
-              <a:rPr sz="1000" b="0">
-                <a:solidFill>
-                  <a:srgbClr val="44546A"/>
-                </a:solidFill>
-                <a:latin typeface="DM Sans"/>
-              </a:rPr>
-              <a:t>Concern by region:</a:t>
-            </a:r>
-          </a:p>
-          <a:p>
-            <a:r>
-              <a:rPr sz="1000" b="0">
-                <a:solidFill>
-                  <a:srgbClr val="44546A"/>
-                </a:solidFill>
-                <a:latin typeface="DM Sans"/>
-              </a:rPr>
-              <a:t>– Metro:      XX%</a:t>
-            </a:r>
-          </a:p>
-          <a:p>
-            <a:r>
-              <a:rPr sz="1000" b="0">
-                <a:solidFill>
-                  <a:srgbClr val="44546A"/>
-                </a:solidFill>
-                <a:latin typeface="DM Sans"/>
-              </a:rPr>
-              <a:t>– Regional:   XX%</a:t>
-            </a:r>
-          </a:p>
-          <a:p>
-            <a:r>
-              <a:rPr sz="1000" b="0">
-                <a:solidFill>
-                  <a:srgbClr val="44546A"/>
-                </a:solidFill>
-                <a:latin typeface="DM Sans"/>
-              </a:rPr>
-              <a:t>– Rural:      XX%</a:t>
-            </a:r>
-          </a:p>
-        </p:txBody>
-      </p:sp>
-      <p:sp>
-        <p:nvSpPr>
-          <p:cNvPr id="13" name="TextBox 12"/>
-          <p:cNvSpPr txBox="1"/>
-          <p:nvPr/>
-        </p:nvSpPr>
-        <p:spPr>
-          <a:xfrm>
-            <a:off x="1097280" y="6236208"/>
-            <a:ext cx="10058400" cy="256032"/>
-          </a:xfrm>
-          <a:prstGeom prst="rect">
-            <a:avLst/>
-          </a:prstGeom>
-          <a:noFill/>
-        </p:spPr>
-        <p:txBody>
-          <a:bodyPr wrap="square">
-            <a:spAutoFit/>
-          </a:bodyPr>
-          <a:lstStyle/>
-          <a:p>
-            <a:pPr algn="l"/>
-            <a:r>
-              <a:rPr sz="800" b="0" i="1">
-                <a:solidFill>
-                  <a:srgbClr val="44546A"/>
-                </a:solidFill>
-                <a:latin typeface="DM Sans"/>
-              </a:rPr>
-              <a:t>Base: all respondents (n=200)</a:t>
-            </a:r>
-          </a:p>
-        </p:txBody>
-      </p:sp>
-      <p:sp>
-        <p:nvSpPr>
-          <p:cNvPr id="14" name="Oval 13"/>
-          <p:cNvSpPr/>
-          <p:nvPr/>
-        </p:nvSpPr>
-        <p:spPr>
-          <a:xfrm>
-            <a:off x="11548872" y="6217920"/>
-            <a:ext cx="274320" cy="274320"/>
-          </a:xfrm>
-          <a:prstGeom prst="ellipse">
-            <a:avLst/>
-          </a:prstGeom>
-          <a:solidFill>
-            <a:srgbClr val="027F7C"/>
-          </a:solidFill>
-          <a:ln>
-            <a:noFill/>
-          </a:ln>
-        </p:spPr>
-        <p:style>
-          <a:lnRef idx="1">
-            <a:schemeClr val="accent1"/>
-          </a:lnRef>
-          <a:fillRef idx="3">
-            <a:schemeClr val="accent1"/>
-          </a:fillRef>
-          <a:effectRef idx="2">
-            <a:schemeClr val="accent1"/>
-          </a:effectRef>
-          <a:fontRef idx="minor">
-            <a:schemeClr val="lt1"/>
-          </a:fontRef>
-        </p:style>
-        <p:txBody>
-          <a:bodyPr rtlCol="0" anchor="ctr"/>
-          <a:lstStyle/>
-          <a:p>
-            <a:pPr algn="ctr"/>
-          </a:p>
-        </p:txBody>
-      </p:sp>
-      <p:sp>
-        <p:nvSpPr>
-          <p:cNvPr id="15" name="TextBox 14"/>
+          <p:cNvPr id="14" name="TextBox 13"/>
           <p:cNvSpPr txBox="1"/>
           <p:nvPr/>
         </p:nvSpPr>
@@ -8297,29 +8163,48 @@
       <p:grpSpPr/>
       <p:sp>
         <p:nvSpPr>
-          <p:cNvPr id="2" name="TextBox 1"/>
-          <p:cNvSpPr txBox="1"/>
-          <p:nvPr/>
-        </p:nvSpPr>
-        <p:spPr>
-          <a:xfrm>
-            <a:off x="310896" y="201168"/>
-            <a:ext cx="11567160" cy="749808"/>
-          </a:xfrm>
-          <a:prstGeom prst="rect">
-            <a:avLst/>
-          </a:prstGeom>
-          <a:noFill/>
-        </p:spPr>
-        <p:txBody>
-          <a:bodyPr wrap="square">
-            <a:spAutoFit/>
-          </a:bodyPr>
+          <p:cNvPr id="2" name="Text Placeholder 1"/>
+          <p:cNvSpPr>
+            <a:spLocks noGrp="1"/>
+          </p:cNvSpPr>
+          <p:nvPr>
+            <p:ph type="body" idx="22" sz="quarter"/>
+          </p:nvPr>
+        </p:nvSpPr>
+        <p:spPr/>
+        <p:txBody>
+          <a:bodyPr wrap="square"/>
           <a:lstStyle/>
           <a:p>
-            <a:pPr algn="l"/>
-            <a:r>
-              <a:rPr sz="1800" b="1" i="0">
+            <a:r>
+              <a:rPr sz="800" i="1">
+                <a:solidFill>
+                  <a:srgbClr val="44546A"/>
+                </a:solidFill>
+                <a:latin typeface="DM Sans"/>
+              </a:rPr>
+              <a:t>Base: all respondents (n=200)</a:t>
+            </a:r>
+          </a:p>
+        </p:txBody>
+      </p:sp>
+      <p:sp>
+        <p:nvSpPr>
+          <p:cNvPr id="3" name="Title 2"/>
+          <p:cNvSpPr>
+            <a:spLocks noGrp="1"/>
+          </p:cNvSpPr>
+          <p:nvPr>
+            <p:ph type="title"/>
+          </p:nvPr>
+        </p:nvSpPr>
+        <p:spPr/>
+        <p:txBody>
+          <a:bodyPr wrap="square"/>
+          <a:lstStyle/>
+          <a:p>
+            <a:r>
+              <a:rPr sz="1800" b="1">
                 <a:solidFill>
                   <a:srgbClr val="027F7C"/>
                 </a:solidFill>
@@ -8332,20 +8217,71 @@
       </p:sp>
       <p:sp>
         <p:nvSpPr>
-          <p:cNvPr id="3" name="Rectangle 2"/>
+          <p:cNvPr id="4" name="Text Placeholder 3"/>
+          <p:cNvSpPr>
+            <a:spLocks noGrp="1"/>
+          </p:cNvSpPr>
+          <p:nvPr>
+            <p:ph type="body" idx="21" sz="quarter"/>
+          </p:nvPr>
+        </p:nvSpPr>
+        <p:spPr/>
+        <p:txBody>
+          <a:bodyPr wrap="square"/>
+          <a:lstStyle/>
+          <a:p>
+            <a:r>
+              <a:rPr sz="1100" i="1">
+                <a:solidFill>
+                  <a:srgbClr val="44546A"/>
+                </a:solidFill>
+                <a:latin typeface="DM Sans"/>
+              </a:rPr>
+              <a:t>The government is handling this issue effectively. (%)</a:t>
+            </a:r>
+          </a:p>
+        </p:txBody>
+      </p:sp>
+      <p:pic>
+        <p:nvPicPr>
+          <p:cNvPr id="5" name="Picture 4" descr="image.png"/>
+          <p:cNvPicPr>
+            <a:picLocks noChangeAspect="1"/>
+          </p:cNvPicPr>
+          <p:nvPr/>
+        </p:nvPicPr>
+        <p:blipFill>
+          <a:blip r:embed="rId2"/>
+          <a:stretch>
+            <a:fillRect/>
+          </a:stretch>
+        </p:blipFill>
+        <p:spPr>
+          <a:xfrm>
+            <a:off x="310896" y="1709928"/>
+            <a:ext cx="6611112" cy="4251960"/>
+          </a:xfrm>
+          <a:prstGeom prst="rect">
+            <a:avLst/>
+          </a:prstGeom>
+        </p:spPr>
+      </p:pic>
+      <p:sp>
+        <p:nvSpPr>
+          <p:cNvPr id="6" name="Oval 5"/>
           <p:cNvSpPr/>
           <p:nvPr/>
         </p:nvSpPr>
         <p:spPr>
           <a:xfrm>
-            <a:off x="310896" y="1005840"/>
-            <a:ext cx="11878056" cy="27432"/>
-          </a:xfrm>
-          <a:prstGeom prst="rect">
+            <a:off x="6128308" y="2137958"/>
+            <a:ext cx="1133856" cy="1133856"/>
+          </a:xfrm>
+          <a:prstGeom prst="ellipse">
             <a:avLst/>
           </a:prstGeom>
           <a:solidFill>
-            <a:srgbClr val="027F7C"/>
+            <a:srgbClr val="00BDBB"/>
           </a:solidFill>
           <a:ln>
             <a:noFill/>
@@ -8375,14 +8311,14 @@
       </p:sp>
       <p:sp>
         <p:nvSpPr>
-          <p:cNvPr id="4" name="TextBox 3"/>
+          <p:cNvPr id="7" name="TextBox 6"/>
           <p:cNvSpPr txBox="1"/>
           <p:nvPr/>
         </p:nvSpPr>
         <p:spPr>
           <a:xfrm>
-            <a:off x="310896" y="1042415"/>
-            <a:ext cx="8229600" cy="347472"/>
+            <a:off x="6128308" y="2251344"/>
+            <a:ext cx="1133856" cy="589605"/>
           </a:xfrm>
           <a:prstGeom prst="rect">
             <a:avLst/>
@@ -8395,59 +8331,70 @@
           </a:bodyPr>
           <a:lstStyle/>
           <a:p>
-            <a:pPr algn="l"/>
-            <a:r>
-              <a:rPr sz="1100" b="0" i="1">
-                <a:solidFill>
-                  <a:srgbClr val="44546A"/>
+            <a:pPr algn="ctr"/>
+            <a:r>
+              <a:rPr sz="3200" b="1" i="0">
+                <a:solidFill>
+                  <a:srgbClr val="FFFFFF"/>
                 </a:solidFill>
                 <a:latin typeface="DM Sans"/>
               </a:rPr>
-              <a:t>The government is handling this issue effectively. (%)</a:t>
-            </a:r>
-          </a:p>
-        </p:txBody>
-      </p:sp>
-      <p:pic>
-        <p:nvPicPr>
-          <p:cNvPr id="5" name="Picture 4" descr="image.png"/>
-          <p:cNvPicPr>
-            <a:picLocks noChangeAspect="1"/>
-          </p:cNvPicPr>
+              <a:t>23%</a:t>
+            </a:r>
+          </a:p>
+        </p:txBody>
+      </p:sp>
+      <p:sp>
+        <p:nvSpPr>
+          <p:cNvPr id="8" name="TextBox 7"/>
+          <p:cNvSpPr txBox="1"/>
           <p:nvPr/>
-        </p:nvPicPr>
-        <p:blipFill>
-          <a:blip r:embed="rId2"/>
-          <a:stretch>
-            <a:fillRect/>
-          </a:stretch>
-        </p:blipFill>
-        <p:spPr>
-          <a:xfrm>
-            <a:off x="310896" y="1463040"/>
-            <a:ext cx="6702552" cy="4251960"/>
-          </a:xfrm>
-          <a:prstGeom prst="rect">
-            <a:avLst/>
-          </a:prstGeom>
-        </p:spPr>
-      </p:pic>
-      <p:sp>
-        <p:nvSpPr>
-          <p:cNvPr id="6" name="Oval 5"/>
+        </p:nvSpPr>
+        <p:spPr>
+          <a:xfrm>
+            <a:off x="6128308" y="2795595"/>
+            <a:ext cx="1133856" cy="408188"/>
+          </a:xfrm>
+          <a:prstGeom prst="rect">
+            <a:avLst/>
+          </a:prstGeom>
+          <a:noFill/>
+        </p:spPr>
+        <p:txBody>
+          <a:bodyPr wrap="square">
+            <a:spAutoFit/>
+          </a:bodyPr>
+          <a:lstStyle/>
+          <a:p>
+            <a:pPr algn="ctr"/>
+            <a:r>
+              <a:rPr sz="1700" b="0" i="0">
+                <a:solidFill>
+                  <a:srgbClr val="FFFFFF"/>
+                </a:solidFill>
+                <a:latin typeface="DM Sans"/>
+              </a:rPr>
+              <a:t>Agree</a:t>
+            </a:r>
+          </a:p>
+        </p:txBody>
+      </p:sp>
+      <p:sp>
+        <p:nvSpPr>
+          <p:cNvPr id="9" name="Oval 8"/>
           <p:cNvSpPr/>
           <p:nvPr/>
         </p:nvSpPr>
         <p:spPr>
           <a:xfrm>
-            <a:off x="6219748" y="1891070"/>
-            <a:ext cx="1133856" cy="1133856"/>
+            <a:off x="6213348" y="4570079"/>
+            <a:ext cx="963777" cy="963777"/>
           </a:xfrm>
           <a:prstGeom prst="ellipse">
             <a:avLst/>
           </a:prstGeom>
           <a:solidFill>
-            <a:srgbClr val="00BDBB"/>
+            <a:srgbClr val="A32015"/>
           </a:solidFill>
           <a:ln>
             <a:noFill/>
@@ -8477,14 +8424,14 @@
       </p:sp>
       <p:sp>
         <p:nvSpPr>
-          <p:cNvPr id="7" name="TextBox 6"/>
+          <p:cNvPr id="10" name="TextBox 9"/>
           <p:cNvSpPr txBox="1"/>
           <p:nvPr/>
         </p:nvSpPr>
         <p:spPr>
           <a:xfrm>
-            <a:off x="6219748" y="2004456"/>
-            <a:ext cx="1133856" cy="589605"/>
+            <a:off x="6213348" y="4666457"/>
+            <a:ext cx="963777" cy="501164"/>
           </a:xfrm>
           <a:prstGeom prst="rect">
             <a:avLst/>
@@ -8499,27 +8446,27 @@
           <a:p>
             <a:pPr algn="ctr"/>
             <a:r>
-              <a:rPr sz="3200" b="1" i="0">
+              <a:rPr sz="2700" b="1" i="0">
                 <a:solidFill>
                   <a:srgbClr val="FFFFFF"/>
                 </a:solidFill>
                 <a:latin typeface="DM Sans"/>
               </a:rPr>
-              <a:t>23%</a:t>
-            </a:r>
-          </a:p>
-        </p:txBody>
-      </p:sp>
-      <p:sp>
-        <p:nvSpPr>
-          <p:cNvPr id="8" name="TextBox 7"/>
+              <a:t>60%</a:t>
+            </a:r>
+          </a:p>
+        </p:txBody>
+      </p:sp>
+      <p:sp>
+        <p:nvSpPr>
+          <p:cNvPr id="11" name="TextBox 10"/>
           <p:cNvSpPr txBox="1"/>
           <p:nvPr/>
         </p:nvSpPr>
         <p:spPr>
           <a:xfrm>
-            <a:off x="6219748" y="2548707"/>
-            <a:ext cx="1133856" cy="408188"/>
+            <a:off x="6213348" y="5129070"/>
+            <a:ext cx="963777" cy="346959"/>
           </a:xfrm>
           <a:prstGeom prst="rect">
             <a:avLst/>
@@ -8534,33 +8481,122 @@
           <a:p>
             <a:pPr algn="ctr"/>
             <a:r>
-              <a:rPr sz="1700" b="0" i="0">
+              <a:rPr sz="1400" b="0" i="0">
                 <a:solidFill>
                   <a:srgbClr val="FFFFFF"/>
                 </a:solidFill>
                 <a:latin typeface="DM Sans"/>
               </a:rPr>
-              <a:t>Agree</a:t>
-            </a:r>
-          </a:p>
-        </p:txBody>
-      </p:sp>
-      <p:sp>
-        <p:nvSpPr>
-          <p:cNvPr id="9" name="Oval 8"/>
+              <a:t>Disagree</a:t>
+            </a:r>
+          </a:p>
+        </p:txBody>
+      </p:sp>
+      <p:sp>
+        <p:nvSpPr>
+          <p:cNvPr id="12" name="TextBox 11"/>
+          <p:cNvSpPr txBox="1"/>
+          <p:nvPr/>
+        </p:nvSpPr>
+        <p:spPr>
+          <a:xfrm>
+            <a:off x="7379208" y="1709928"/>
+            <a:ext cx="4443983" cy="4251960"/>
+          </a:xfrm>
+          <a:prstGeom prst="rect">
+            <a:avLst/>
+          </a:prstGeom>
+          <a:noFill/>
+        </p:spPr>
+        <p:txBody>
+          <a:bodyPr wrap="square">
+            <a:spAutoFit/>
+          </a:bodyPr>
+          <a:lstStyle/>
+          <a:p>
+            <a:r>
+              <a:rPr sz="1000" b="0">
+                <a:solidFill>
+                  <a:srgbClr val="44546A"/>
+                </a:solidFill>
+                <a:latin typeface="DM Sans"/>
+              </a:rPr>
+              <a:t>Scepticism about government performance</a:t>
+            </a:r>
+          </a:p>
+          <a:p>
+            <a:r>
+              <a:rPr sz="1000" b="0">
+                <a:solidFill>
+                  <a:srgbClr val="44546A"/>
+                </a:solidFill>
+                <a:latin typeface="DM Sans"/>
+              </a:rPr>
+              <a:t>is consistent across all demographics.</a:t>
+            </a:r>
+          </a:p>
+          <a:p>
+            <a:r>
+              <a:rPr sz="1000" b="0">
+                <a:solidFill>
+                  <a:srgbClr val="44546A"/>
+                </a:solidFill>
+                <a:latin typeface="DM Sans"/>
+              </a:rPr>
+              <a:t/>
+            </a:r>
+          </a:p>
+          <a:p>
+            <a:r>
+              <a:rPr sz="1000" b="0">
+                <a:solidFill>
+                  <a:srgbClr val="44546A"/>
+                </a:solidFill>
+                <a:latin typeface="DM Sans"/>
+              </a:rPr>
+              <a:t>Disagreement is highest among:</a:t>
+            </a:r>
+          </a:p>
+          <a:p>
+            <a:r>
+              <a:rPr sz="1000" b="0">
+                <a:solidFill>
+                  <a:srgbClr val="44546A"/>
+                </a:solidFill>
+                <a:latin typeface="DM Sans"/>
+              </a:rPr>
+              <a:t>– 35–54 year olds (XX%)</a:t>
+            </a:r>
+          </a:p>
+          <a:p>
+            <a:r>
+              <a:rPr sz="1000" b="0">
+                <a:solidFill>
+                  <a:srgbClr val="44546A"/>
+                </a:solidFill>
+                <a:latin typeface="DM Sans"/>
+              </a:rPr>
+              <a:t>– Regional residents (XX%)</a:t>
+            </a:r>
+          </a:p>
+        </p:txBody>
+      </p:sp>
+      <p:sp>
+        <p:nvSpPr>
+          <p:cNvPr id="13" name="Oval 12"/>
           <p:cNvSpPr/>
           <p:nvPr/>
         </p:nvSpPr>
         <p:spPr>
           <a:xfrm>
-            <a:off x="6304788" y="4323191"/>
-            <a:ext cx="963777" cy="963777"/>
+            <a:off x="11548872" y="6217920"/>
+            <a:ext cx="274320" cy="274320"/>
           </a:xfrm>
           <a:prstGeom prst="ellipse">
             <a:avLst/>
           </a:prstGeom>
           <a:solidFill>
-            <a:srgbClr val="A32015"/>
+            <a:srgbClr val="027F7C"/>
           </a:solidFill>
           <a:ln>
             <a:noFill/>
@@ -8590,244 +8626,7 @@
       </p:sp>
       <p:sp>
         <p:nvSpPr>
-          <p:cNvPr id="10" name="TextBox 9"/>
-          <p:cNvSpPr txBox="1"/>
-          <p:nvPr/>
-        </p:nvSpPr>
-        <p:spPr>
-          <a:xfrm>
-            <a:off x="6304788" y="4419569"/>
-            <a:ext cx="963777" cy="501164"/>
-          </a:xfrm>
-          <a:prstGeom prst="rect">
-            <a:avLst/>
-          </a:prstGeom>
-          <a:noFill/>
-        </p:spPr>
-        <p:txBody>
-          <a:bodyPr wrap="square">
-            <a:spAutoFit/>
-          </a:bodyPr>
-          <a:lstStyle/>
-          <a:p>
-            <a:pPr algn="ctr"/>
-            <a:r>
-              <a:rPr sz="2700" b="1" i="0">
-                <a:solidFill>
-                  <a:srgbClr val="FFFFFF"/>
-                </a:solidFill>
-                <a:latin typeface="DM Sans"/>
-              </a:rPr>
-              <a:t>60%</a:t>
-            </a:r>
-          </a:p>
-        </p:txBody>
-      </p:sp>
-      <p:sp>
-        <p:nvSpPr>
-          <p:cNvPr id="11" name="TextBox 10"/>
-          <p:cNvSpPr txBox="1"/>
-          <p:nvPr/>
-        </p:nvSpPr>
-        <p:spPr>
-          <a:xfrm>
-            <a:off x="6304788" y="4882182"/>
-            <a:ext cx="963777" cy="346959"/>
-          </a:xfrm>
-          <a:prstGeom prst="rect">
-            <a:avLst/>
-          </a:prstGeom>
-          <a:noFill/>
-        </p:spPr>
-        <p:txBody>
-          <a:bodyPr wrap="square">
-            <a:spAutoFit/>
-          </a:bodyPr>
-          <a:lstStyle/>
-          <a:p>
-            <a:pPr algn="ctr"/>
-            <a:r>
-              <a:rPr sz="1400" b="0" i="0">
-                <a:solidFill>
-                  <a:srgbClr val="FFFFFF"/>
-                </a:solidFill>
-                <a:latin typeface="DM Sans"/>
-              </a:rPr>
-              <a:t>Disagree</a:t>
-            </a:r>
-          </a:p>
-        </p:txBody>
-      </p:sp>
-      <p:sp>
-        <p:nvSpPr>
-          <p:cNvPr id="12" name="TextBox 11"/>
-          <p:cNvSpPr txBox="1"/>
-          <p:nvPr/>
-        </p:nvSpPr>
-        <p:spPr>
-          <a:xfrm>
-            <a:off x="7434072" y="1463040"/>
-            <a:ext cx="4389119" cy="4251960"/>
-          </a:xfrm>
-          <a:prstGeom prst="rect">
-            <a:avLst/>
-          </a:prstGeom>
-          <a:noFill/>
-        </p:spPr>
-        <p:txBody>
-          <a:bodyPr wrap="square">
-            <a:spAutoFit/>
-          </a:bodyPr>
-          <a:lstStyle/>
-          <a:p>
-            <a:r>
-              <a:rPr sz="1000" b="0">
-                <a:solidFill>
-                  <a:srgbClr val="44546A"/>
-                </a:solidFill>
-                <a:latin typeface="DM Sans"/>
-              </a:rPr>
-              <a:t>Scepticism about government performance</a:t>
-            </a:r>
-          </a:p>
-          <a:p>
-            <a:r>
-              <a:rPr sz="1000" b="0">
-                <a:solidFill>
-                  <a:srgbClr val="44546A"/>
-                </a:solidFill>
-                <a:latin typeface="DM Sans"/>
-              </a:rPr>
-              <a:t>is consistent across all demographics.</a:t>
-            </a:r>
-          </a:p>
-          <a:p>
-            <a:r>
-              <a:rPr sz="1000" b="0">
-                <a:solidFill>
-                  <a:srgbClr val="44546A"/>
-                </a:solidFill>
-                <a:latin typeface="DM Sans"/>
-              </a:rPr>
-              <a:t/>
-            </a:r>
-          </a:p>
-          <a:p>
-            <a:r>
-              <a:rPr sz="1000" b="0">
-                <a:solidFill>
-                  <a:srgbClr val="44546A"/>
-                </a:solidFill>
-                <a:latin typeface="DM Sans"/>
-              </a:rPr>
-              <a:t>Disagreement is highest among:</a:t>
-            </a:r>
-          </a:p>
-          <a:p>
-            <a:r>
-              <a:rPr sz="1000" b="0">
-                <a:solidFill>
-                  <a:srgbClr val="44546A"/>
-                </a:solidFill>
-                <a:latin typeface="DM Sans"/>
-              </a:rPr>
-              <a:t>– 35–54 year olds (XX%)</a:t>
-            </a:r>
-          </a:p>
-          <a:p>
-            <a:r>
-              <a:rPr sz="1000" b="0">
-                <a:solidFill>
-                  <a:srgbClr val="44546A"/>
-                </a:solidFill>
-                <a:latin typeface="DM Sans"/>
-              </a:rPr>
-              <a:t>– Regional residents (XX%)</a:t>
-            </a:r>
-          </a:p>
-        </p:txBody>
-      </p:sp>
-      <p:sp>
-        <p:nvSpPr>
-          <p:cNvPr id="13" name="TextBox 12"/>
-          <p:cNvSpPr txBox="1"/>
-          <p:nvPr/>
-        </p:nvSpPr>
-        <p:spPr>
-          <a:xfrm>
-            <a:off x="1097280" y="6236208"/>
-            <a:ext cx="10058400" cy="256032"/>
-          </a:xfrm>
-          <a:prstGeom prst="rect">
-            <a:avLst/>
-          </a:prstGeom>
-          <a:noFill/>
-        </p:spPr>
-        <p:txBody>
-          <a:bodyPr wrap="square">
-            <a:spAutoFit/>
-          </a:bodyPr>
-          <a:lstStyle/>
-          <a:p>
-            <a:pPr algn="l"/>
-            <a:r>
-              <a:rPr sz="800" b="0" i="1">
-                <a:solidFill>
-                  <a:srgbClr val="44546A"/>
-                </a:solidFill>
-                <a:latin typeface="DM Sans"/>
-              </a:rPr>
-              <a:t>Base: all respondents (n=200)</a:t>
-            </a:r>
-          </a:p>
-        </p:txBody>
-      </p:sp>
-      <p:sp>
-        <p:nvSpPr>
-          <p:cNvPr id="14" name="Oval 13"/>
-          <p:cNvSpPr/>
-          <p:nvPr/>
-        </p:nvSpPr>
-        <p:spPr>
-          <a:xfrm>
-            <a:off x="11548872" y="6217920"/>
-            <a:ext cx="274320" cy="274320"/>
-          </a:xfrm>
-          <a:prstGeom prst="ellipse">
-            <a:avLst/>
-          </a:prstGeom>
-          <a:solidFill>
-            <a:srgbClr val="027F7C"/>
-          </a:solidFill>
-          <a:ln>
-            <a:noFill/>
-          </a:ln>
-        </p:spPr>
-        <p:style>
-          <a:lnRef idx="1">
-            <a:schemeClr val="accent1"/>
-          </a:lnRef>
-          <a:fillRef idx="3">
-            <a:schemeClr val="accent1"/>
-          </a:fillRef>
-          <a:effectRef idx="2">
-            <a:schemeClr val="accent1"/>
-          </a:effectRef>
-          <a:fontRef idx="minor">
-            <a:schemeClr val="lt1"/>
-          </a:fontRef>
-        </p:style>
-        <p:txBody>
-          <a:bodyPr rtlCol="0" anchor="ctr"/>
-          <a:lstStyle/>
-          <a:p>
-            <a:pPr algn="ctr"/>
-          </a:p>
-        </p:txBody>
-      </p:sp>
-      <p:sp>
-        <p:nvSpPr>
-          <p:cNvPr id="15" name="TextBox 14"/>
+          <p:cNvPr id="14" name="TextBox 13"/>
           <p:cNvSpPr txBox="1"/>
           <p:nvPr/>
         </p:nvSpPr>
@@ -8976,29 +8775,21 @@
       <p:grpSpPr/>
       <p:sp>
         <p:nvSpPr>
-          <p:cNvPr id="2" name="TextBox 1"/>
-          <p:cNvSpPr txBox="1"/>
-          <p:nvPr/>
-        </p:nvSpPr>
-        <p:spPr>
-          <a:xfrm>
-            <a:off x="310896" y="201168"/>
-            <a:ext cx="11567160" cy="749808"/>
-          </a:xfrm>
-          <a:prstGeom prst="rect">
-            <a:avLst/>
-          </a:prstGeom>
-          <a:noFill/>
-        </p:spPr>
-        <p:txBody>
-          <a:bodyPr wrap="square">
-            <a:spAutoFit/>
-          </a:bodyPr>
+          <p:cNvPr id="2" name="Title 1"/>
+          <p:cNvSpPr>
+            <a:spLocks noGrp="1"/>
+          </p:cNvSpPr>
+          <p:nvPr>
+            <p:ph type="title"/>
+          </p:nvPr>
+        </p:nvSpPr>
+        <p:spPr/>
+        <p:txBody>
+          <a:bodyPr wrap="square"/>
           <a:lstStyle/>
           <a:p>
-            <a:pPr algn="l"/>
-            <a:r>
-              <a:rPr sz="1800" b="1" i="0">
+            <a:r>
+              <a:rPr sz="1800" b="1">
                 <a:solidFill>
                   <a:srgbClr val="027F7C"/>
                 </a:solidFill>
@@ -9011,16 +8802,245 @@
       </p:sp>
       <p:sp>
         <p:nvSpPr>
-          <p:cNvPr id="3" name="Rectangle 2"/>
+          <p:cNvPr id="3" name="Text Placeholder 2"/>
+          <p:cNvSpPr>
+            <a:spLocks noGrp="1"/>
+          </p:cNvSpPr>
+          <p:nvPr>
+            <p:ph type="body" idx="21" sz="quarter"/>
+          </p:nvPr>
+        </p:nvSpPr>
+        <p:spPr/>
+        <p:txBody>
+          <a:bodyPr wrap="square"/>
+          <a:lstStyle/>
+          <a:p>
+            <a:r>
+              <a:rPr sz="1100" i="1">
+                <a:solidFill>
+                  <a:srgbClr val="44546A"/>
+                </a:solidFill>
+                <a:latin typeface="DM Sans"/>
+              </a:rPr>
+              <a:t>How strongly do you agree or disagree with each of the following statements? (%)</a:t>
+            </a:r>
+          </a:p>
+        </p:txBody>
+      </p:sp>
+      <p:sp>
+        <p:nvSpPr>
+          <p:cNvPr id="4" name="Text Placeholder 3"/>
+          <p:cNvSpPr>
+            <a:spLocks noGrp="1"/>
+          </p:cNvSpPr>
+          <p:nvPr>
+            <p:ph type="body" idx="12" sz="quarter"/>
+          </p:nvPr>
+        </p:nvSpPr>
+        <p:spPr/>
+        <p:txBody>
+          <a:bodyPr/>
+          <a:lstStyle/>
+          <a:p/>
+        </p:txBody>
+      </p:sp>
+      <p:sp>
+        <p:nvSpPr>
+          <p:cNvPr id="5" name="Text Placeholder 4"/>
+          <p:cNvSpPr>
+            <a:spLocks noGrp="1"/>
+          </p:cNvSpPr>
+          <p:nvPr>
+            <p:ph type="body" idx="19" sz="quarter"/>
+          </p:nvPr>
+        </p:nvSpPr>
+        <p:spPr/>
+        <p:txBody>
+          <a:bodyPr wrap="square"/>
+          <a:lstStyle/>
+          <a:p>
+            <a:r>
+              <a:rPr sz="1000">
+                <a:solidFill>
+                  <a:srgbClr val="44546A"/>
+                </a:solidFill>
+                <a:latin typeface="DM Sans"/>
+              </a:rPr>
+              <a:t>Total agree by statement:</a:t>
+            </a:r>
+          </a:p>
+          <a:p>
+            <a:r>
+              <a:rPr sz="1000">
+                <a:solidFill>
+                  <a:srgbClr val="44546A"/>
+                </a:solidFill>
+                <a:latin typeface="DM Sans"/>
+              </a:rPr>
+              <a:t>– Community impact:   XX%</a:t>
+            </a:r>
+          </a:p>
+          <a:p>
+            <a:r>
+              <a:rPr sz="1000">
+                <a:solidFill>
+                  <a:srgbClr val="44546A"/>
+                </a:solidFill>
+                <a:latin typeface="DM Sans"/>
+              </a:rPr>
+              <a:t>– Govt leadership:    XX%</a:t>
+            </a:r>
+          </a:p>
+          <a:p>
+            <a:r>
+              <a:rPr sz="1000">
+                <a:solidFill>
+                  <a:srgbClr val="44546A"/>
+                </a:solidFill>
+                <a:latin typeface="DM Sans"/>
+              </a:rPr>
+              <a:t>– Local action:       XX%</a:t>
+            </a:r>
+          </a:p>
+          <a:p>
+            <a:r>
+              <a:rPr sz="1000">
+                <a:solidFill>
+                  <a:srgbClr val="44546A"/>
+                </a:solidFill>
+                <a:latin typeface="DM Sans"/>
+              </a:rPr>
+              <a:t/>
+            </a:r>
+          </a:p>
+          <a:p>
+            <a:r>
+              <a:rPr sz="1000">
+                <a:solidFill>
+                  <a:srgbClr val="44546A"/>
+                </a:solidFill>
+                <a:latin typeface="DM Sans"/>
+              </a:rPr>
+              <a:t>Agreement is broadly consistent</a:t>
+            </a:r>
+          </a:p>
+          <a:p>
+            <a:r>
+              <a:rPr sz="1000">
+                <a:solidFill>
+                  <a:srgbClr val="44546A"/>
+                </a:solidFill>
+                <a:latin typeface="DM Sans"/>
+              </a:rPr>
+              <a:t>across age groups and regions.</a:t>
+            </a:r>
+          </a:p>
+        </p:txBody>
+      </p:sp>
+      <p:sp>
+        <p:nvSpPr>
+          <p:cNvPr id="6" name="Text Placeholder 5"/>
+          <p:cNvSpPr>
+            <a:spLocks noGrp="1"/>
+          </p:cNvSpPr>
+          <p:nvPr>
+            <p:ph type="body" idx="20" sz="quarter"/>
+          </p:nvPr>
+        </p:nvSpPr>
+        <p:spPr/>
+        <p:txBody>
+          <a:bodyPr/>
+          <a:lstStyle/>
+          <a:p/>
+        </p:txBody>
+      </p:sp>
+      <p:sp>
+        <p:nvSpPr>
+          <p:cNvPr id="7" name="Text Placeholder 6"/>
+          <p:cNvSpPr>
+            <a:spLocks noGrp="1"/>
+          </p:cNvSpPr>
+          <p:nvPr>
+            <p:ph type="body" idx="22" sz="quarter"/>
+          </p:nvPr>
+        </p:nvSpPr>
+        <p:spPr/>
+        <p:txBody>
+          <a:bodyPr wrap="square"/>
+          <a:lstStyle/>
+          <a:p>
+            <a:r>
+              <a:rPr sz="800" i="1">
+                <a:solidFill>
+                  <a:srgbClr val="44546A"/>
+                </a:solidFill>
+                <a:latin typeface="DM Sans"/>
+              </a:rPr>
+              <a:t>Base: all respondents (n=200)</a:t>
+            </a:r>
+          </a:p>
+        </p:txBody>
+      </p:sp>
+      <p:pic>
+        <p:nvPicPr>
+          <p:cNvPr id="8" name="Picture 7" descr="image.png"/>
+          <p:cNvPicPr>
+            <a:picLocks noChangeAspect="1"/>
+          </p:cNvPicPr>
+          <p:nvPr/>
+        </p:nvPicPr>
+        <p:blipFill>
+          <a:blip r:embed="rId2"/>
+          <a:stretch>
+            <a:fillRect/>
+          </a:stretch>
+        </p:blipFill>
+        <p:spPr>
+          <a:xfrm>
+            <a:off x="310896" y="1709928"/>
+            <a:ext cx="6099048" cy="2880360"/>
+          </a:xfrm>
+          <a:prstGeom prst="rect">
+            <a:avLst/>
+          </a:prstGeom>
+        </p:spPr>
+      </p:pic>
+      <p:pic>
+        <p:nvPicPr>
+          <p:cNvPr id="9" name="Picture 8" descr="image.png"/>
+          <p:cNvPicPr>
+            <a:picLocks noChangeAspect="1"/>
+          </p:cNvPicPr>
+          <p:nvPr/>
+        </p:nvPicPr>
+        <p:blipFill>
+          <a:blip r:embed="rId3"/>
+          <a:stretch>
+            <a:fillRect/>
+          </a:stretch>
+        </p:blipFill>
+        <p:spPr>
+          <a:xfrm>
+            <a:off x="310896" y="4663440"/>
+            <a:ext cx="6099048" cy="274320"/>
+          </a:xfrm>
+          <a:prstGeom prst="rect">
+            <a:avLst/>
+          </a:prstGeom>
+        </p:spPr>
+      </p:pic>
+      <p:sp>
+        <p:nvSpPr>
+          <p:cNvPr id="10" name="Oval 9"/>
           <p:cNvSpPr/>
           <p:nvPr/>
         </p:nvSpPr>
         <p:spPr>
           <a:xfrm>
-            <a:off x="310896" y="1005840"/>
-            <a:ext cx="11878056" cy="27432"/>
-          </a:xfrm>
-          <a:prstGeom prst="rect">
+            <a:off x="11548872" y="6217920"/>
+            <a:ext cx="274320" cy="274320"/>
+          </a:xfrm>
+          <a:prstGeom prst="ellipse">
             <a:avLst/>
           </a:prstGeom>
           <a:solidFill>
@@ -9054,268 +9074,7 @@
       </p:sp>
       <p:sp>
         <p:nvSpPr>
-          <p:cNvPr id="4" name="TextBox 3"/>
-          <p:cNvSpPr txBox="1"/>
-          <p:nvPr/>
-        </p:nvSpPr>
-        <p:spPr>
-          <a:xfrm>
-            <a:off x="310896" y="1042415"/>
-            <a:ext cx="8229600" cy="347472"/>
-          </a:xfrm>
-          <a:prstGeom prst="rect">
-            <a:avLst/>
-          </a:prstGeom>
-          <a:noFill/>
-        </p:spPr>
-        <p:txBody>
-          <a:bodyPr wrap="square">
-            <a:spAutoFit/>
-          </a:bodyPr>
-          <a:lstStyle/>
-          <a:p>
-            <a:pPr algn="l"/>
-            <a:r>
-              <a:rPr sz="1100" b="0" i="1">
-                <a:solidFill>
-                  <a:srgbClr val="44546A"/>
-                </a:solidFill>
-                <a:latin typeface="DM Sans"/>
-              </a:rPr>
-              <a:t>How strongly do you agree or disagree with each of the following statements? (%)</a:t>
-            </a:r>
-          </a:p>
-        </p:txBody>
-      </p:sp>
-      <p:pic>
-        <p:nvPicPr>
-          <p:cNvPr id="5" name="Picture 4" descr="image.png"/>
-          <p:cNvPicPr>
-            <a:picLocks noChangeAspect="1"/>
-          </p:cNvPicPr>
-          <p:nvPr/>
-        </p:nvPicPr>
-        <p:blipFill>
-          <a:blip r:embed="rId2"/>
-          <a:stretch>
-            <a:fillRect/>
-          </a:stretch>
-        </p:blipFill>
-        <p:spPr>
-          <a:xfrm>
-            <a:off x="310896" y="1463040"/>
-            <a:ext cx="6099048" cy="2880360"/>
-          </a:xfrm>
-          <a:prstGeom prst="rect">
-            <a:avLst/>
-          </a:prstGeom>
-        </p:spPr>
-      </p:pic>
-      <p:pic>
-        <p:nvPicPr>
-          <p:cNvPr id="6" name="Picture 5" descr="image.png"/>
-          <p:cNvPicPr>
-            <a:picLocks noChangeAspect="1"/>
-          </p:cNvPicPr>
-          <p:nvPr/>
-        </p:nvPicPr>
-        <p:blipFill>
-          <a:blip r:embed="rId3"/>
-          <a:stretch>
-            <a:fillRect/>
-          </a:stretch>
-        </p:blipFill>
-        <p:spPr>
-          <a:xfrm>
-            <a:off x="310896" y="4416552"/>
-            <a:ext cx="6099048" cy="274320"/>
-          </a:xfrm>
-          <a:prstGeom prst="rect">
-            <a:avLst/>
-          </a:prstGeom>
-        </p:spPr>
-      </p:pic>
-      <p:sp>
-        <p:nvSpPr>
-          <p:cNvPr id="7" name="TextBox 6"/>
-          <p:cNvSpPr txBox="1"/>
-          <p:nvPr/>
-        </p:nvSpPr>
-        <p:spPr>
-          <a:xfrm>
-            <a:off x="7068312" y="1463040"/>
-            <a:ext cx="4754879" cy="2880360"/>
-          </a:xfrm>
-          <a:prstGeom prst="rect">
-            <a:avLst/>
-          </a:prstGeom>
-          <a:noFill/>
-        </p:spPr>
-        <p:txBody>
-          <a:bodyPr wrap="square">
-            <a:spAutoFit/>
-          </a:bodyPr>
-          <a:lstStyle/>
-          <a:p>
-            <a:r>
-              <a:rPr sz="1000" b="0">
-                <a:solidFill>
-                  <a:srgbClr val="44546A"/>
-                </a:solidFill>
-                <a:latin typeface="DM Sans"/>
-              </a:rPr>
-              <a:t>Total agree by statement:</a:t>
-            </a:r>
-          </a:p>
-          <a:p>
-            <a:r>
-              <a:rPr sz="1000" b="0">
-                <a:solidFill>
-                  <a:srgbClr val="44546A"/>
-                </a:solidFill>
-                <a:latin typeface="DM Sans"/>
-              </a:rPr>
-              <a:t>– Community impact:   XX%</a:t>
-            </a:r>
-          </a:p>
-          <a:p>
-            <a:r>
-              <a:rPr sz="1000" b="0">
-                <a:solidFill>
-                  <a:srgbClr val="44546A"/>
-                </a:solidFill>
-                <a:latin typeface="DM Sans"/>
-              </a:rPr>
-              <a:t>– Govt leadership:    XX%</a:t>
-            </a:r>
-          </a:p>
-          <a:p>
-            <a:r>
-              <a:rPr sz="1000" b="0">
-                <a:solidFill>
-                  <a:srgbClr val="44546A"/>
-                </a:solidFill>
-                <a:latin typeface="DM Sans"/>
-              </a:rPr>
-              <a:t>– Local action:       XX%</a:t>
-            </a:r>
-          </a:p>
-          <a:p>
-            <a:r>
-              <a:rPr sz="1000" b="0">
-                <a:solidFill>
-                  <a:srgbClr val="44546A"/>
-                </a:solidFill>
-                <a:latin typeface="DM Sans"/>
-              </a:rPr>
-              <a:t/>
-            </a:r>
-          </a:p>
-          <a:p>
-            <a:r>
-              <a:rPr sz="1000" b="0">
-                <a:solidFill>
-                  <a:srgbClr val="44546A"/>
-                </a:solidFill>
-                <a:latin typeface="DM Sans"/>
-              </a:rPr>
-              <a:t>Agreement is broadly consistent</a:t>
-            </a:r>
-          </a:p>
-          <a:p>
-            <a:r>
-              <a:rPr sz="1000" b="0">
-                <a:solidFill>
-                  <a:srgbClr val="44546A"/>
-                </a:solidFill>
-                <a:latin typeface="DM Sans"/>
-              </a:rPr>
-              <a:t>across age groups and regions.</a:t>
-            </a:r>
-          </a:p>
-        </p:txBody>
-      </p:sp>
-      <p:sp>
-        <p:nvSpPr>
-          <p:cNvPr id="8" name="TextBox 7"/>
-          <p:cNvSpPr txBox="1"/>
-          <p:nvPr/>
-        </p:nvSpPr>
-        <p:spPr>
-          <a:xfrm>
-            <a:off x="1097280" y="6236208"/>
-            <a:ext cx="10058400" cy="256032"/>
-          </a:xfrm>
-          <a:prstGeom prst="rect">
-            <a:avLst/>
-          </a:prstGeom>
-          <a:noFill/>
-        </p:spPr>
-        <p:txBody>
-          <a:bodyPr wrap="square">
-            <a:spAutoFit/>
-          </a:bodyPr>
-          <a:lstStyle/>
-          <a:p>
-            <a:pPr algn="l"/>
-            <a:r>
-              <a:rPr sz="800" b="0" i="1">
-                <a:solidFill>
-                  <a:srgbClr val="44546A"/>
-                </a:solidFill>
-                <a:latin typeface="DM Sans"/>
-              </a:rPr>
-              <a:t>Base: all respondents (n=200)</a:t>
-            </a:r>
-          </a:p>
-        </p:txBody>
-      </p:sp>
-      <p:sp>
-        <p:nvSpPr>
-          <p:cNvPr id="9" name="Oval 8"/>
-          <p:cNvSpPr/>
-          <p:nvPr/>
-        </p:nvSpPr>
-        <p:spPr>
-          <a:xfrm>
-            <a:off x="11548872" y="6217920"/>
-            <a:ext cx="274320" cy="274320"/>
-          </a:xfrm>
-          <a:prstGeom prst="ellipse">
-            <a:avLst/>
-          </a:prstGeom>
-          <a:solidFill>
-            <a:srgbClr val="027F7C"/>
-          </a:solidFill>
-          <a:ln>
-            <a:noFill/>
-          </a:ln>
-        </p:spPr>
-        <p:style>
-          <a:lnRef idx="1">
-            <a:schemeClr val="accent1"/>
-          </a:lnRef>
-          <a:fillRef idx="3">
-            <a:schemeClr val="accent1"/>
-          </a:fillRef>
-          <a:effectRef idx="2">
-            <a:schemeClr val="accent1"/>
-          </a:effectRef>
-          <a:fontRef idx="minor">
-            <a:schemeClr val="lt1"/>
-          </a:fontRef>
-        </p:style>
-        <p:txBody>
-          <a:bodyPr rtlCol="0" anchor="ctr"/>
-          <a:lstStyle/>
-          <a:p>
-            <a:pPr algn="ctr"/>
-          </a:p>
-        </p:txBody>
-      </p:sp>
-      <p:sp>
-        <p:nvSpPr>
-          <p:cNvPr id="10" name="TextBox 9"/>
+          <p:cNvPr id="11" name="TextBox 10"/>
           <p:cNvSpPr txBox="1"/>
           <p:nvPr/>
         </p:nvSpPr>
@@ -9464,14 +9223,119 @@
       <p:grpSpPr/>
       <p:sp>
         <p:nvSpPr>
-          <p:cNvPr id="2" name="TextBox 1"/>
+          <p:cNvPr id="2" name="Text Placeholder 1"/>
+          <p:cNvSpPr>
+            <a:spLocks noGrp="1"/>
+          </p:cNvSpPr>
+          <p:nvPr>
+            <p:ph type="body" idx="22" sz="quarter"/>
+          </p:nvPr>
+        </p:nvSpPr>
+        <p:spPr/>
+        <p:txBody>
+          <a:bodyPr wrap="square"/>
+          <a:lstStyle/>
+          <a:p>
+            <a:r>
+              <a:rPr sz="800" i="1">
+                <a:solidFill>
+                  <a:srgbClr val="44546A"/>
+                </a:solidFill>
+                <a:latin typeface="DM Sans"/>
+              </a:rPr>
+              <a:t>Base: all respondents (n=200)</a:t>
+            </a:r>
+          </a:p>
+        </p:txBody>
+      </p:sp>
+      <p:sp>
+        <p:nvSpPr>
+          <p:cNvPr id="3" name="Title 2"/>
+          <p:cNvSpPr>
+            <a:spLocks noGrp="1"/>
+          </p:cNvSpPr>
+          <p:nvPr>
+            <p:ph type="title"/>
+          </p:nvPr>
+        </p:nvSpPr>
+        <p:spPr/>
+        <p:txBody>
+          <a:bodyPr wrap="square"/>
+          <a:lstStyle/>
+          <a:p>
+            <a:r>
+              <a:rPr sz="1800" b="1">
+                <a:solidFill>
+                  <a:srgbClr val="027F7C"/>
+                </a:solidFill>
+                <a:latin typeface="DM Sans"/>
+              </a:rPr>
+              <a:t>Respondent region</a:t>
+            </a:r>
+          </a:p>
+        </p:txBody>
+      </p:sp>
+      <p:sp>
+        <p:nvSpPr>
+          <p:cNvPr id="4" name="Text Placeholder 3"/>
+          <p:cNvSpPr>
+            <a:spLocks noGrp="1"/>
+          </p:cNvSpPr>
+          <p:nvPr>
+            <p:ph type="body" idx="21" sz="quarter"/>
+          </p:nvPr>
+        </p:nvSpPr>
+        <p:spPr/>
+        <p:txBody>
+          <a:bodyPr wrap="square"/>
+          <a:lstStyle/>
+          <a:p>
+            <a:r>
+              <a:rPr sz="1100" i="1">
+                <a:solidFill>
+                  <a:srgbClr val="44546A"/>
+                </a:solidFill>
+                <a:latin typeface="DM Sans"/>
+              </a:rPr>
+              <a:t>Which region are you based in? (%)</a:t>
+            </a:r>
+          </a:p>
+        </p:txBody>
+      </p:sp>
+      <p:pic>
+        <p:nvPicPr>
+          <p:cNvPr id="5" name="Picture 4" descr="image.png"/>
+          <p:cNvPicPr>
+            <a:picLocks noChangeAspect="1"/>
+          </p:cNvPicPr>
+          <p:nvPr/>
+        </p:nvPicPr>
+        <p:blipFill>
+          <a:blip r:embed="rId2"/>
+          <a:stretch>
+            <a:fillRect/>
+          </a:stretch>
+        </p:blipFill>
+        <p:spPr>
+          <a:xfrm>
+            <a:off x="310896" y="1709928"/>
+            <a:ext cx="6611112" cy="3566160"/>
+          </a:xfrm>
+          <a:prstGeom prst="rect">
+            <a:avLst/>
+          </a:prstGeom>
+        </p:spPr>
+      </p:pic>
+      <p:sp>
+        <p:nvSpPr>
+          <p:cNvPr id="6" name="TextBox 5"/>
           <p:cNvSpPr txBox="1"/>
           <p:nvPr/>
         </p:nvSpPr>
         <p:spPr>
           <a:xfrm>
-            <a:off x="310896" y="201168"/>
-            <a:ext cx="11567160" cy="749808"/>
+            <a:off x="7379208" y="1709928"/>
+            <a:ext cx="4443983" cy="3566160"/>
           </a:xfrm>
           <a:prstGeom prst="rect">
             <a:avLst/>
@@ -9484,31 +9348,41 @@
           </a:bodyPr>
           <a:lstStyle/>
           <a:p>
-            <a:pPr algn="l"/>
-            <a:r>
-              <a:rPr sz="1800" b="1" i="0">
-                <a:solidFill>
-                  <a:srgbClr val="027F7C"/>
+            <a:r>
+              <a:rPr sz="1000" b="0">
+                <a:solidFill>
+                  <a:srgbClr val="44546A"/>
                 </a:solidFill>
                 <a:latin typeface="DM Sans"/>
               </a:rPr>
-              <a:t>Respondent region</a:t>
-            </a:r>
-          </a:p>
-        </p:txBody>
-      </p:sp>
-      <p:sp>
-        <p:nvSpPr>
-          <p:cNvPr id="3" name="Rectangle 2"/>
+              <a:t>Sample is spread across metro, regional,</a:t>
+            </a:r>
+          </a:p>
+          <a:p>
+            <a:r>
+              <a:rPr sz="1000" b="0">
+                <a:solidFill>
+                  <a:srgbClr val="44546A"/>
+                </a:solidFill>
+                <a:latin typeface="DM Sans"/>
+              </a:rPr>
+              <a:t>rural and remote areas.</a:t>
+            </a:r>
+          </a:p>
+        </p:txBody>
+      </p:sp>
+      <p:sp>
+        <p:nvSpPr>
+          <p:cNvPr id="7" name="Oval 6"/>
           <p:cNvSpPr/>
           <p:nvPr/>
         </p:nvSpPr>
         <p:spPr>
           <a:xfrm>
-            <a:off x="310896" y="1005840"/>
-            <a:ext cx="11878056" cy="27432"/>
-          </a:xfrm>
-          <a:prstGeom prst="rect">
+            <a:off x="11548872" y="6217920"/>
+            <a:ext cx="274320" cy="274320"/>
+          </a:xfrm>
+          <a:prstGeom prst="ellipse">
             <a:avLst/>
           </a:prstGeom>
           <a:solidFill>
@@ -9542,189 +9416,7 @@
       </p:sp>
       <p:sp>
         <p:nvSpPr>
-          <p:cNvPr id="4" name="TextBox 3"/>
-          <p:cNvSpPr txBox="1"/>
-          <p:nvPr/>
-        </p:nvSpPr>
-        <p:spPr>
-          <a:xfrm>
-            <a:off x="310896" y="1042415"/>
-            <a:ext cx="8229600" cy="347472"/>
-          </a:xfrm>
-          <a:prstGeom prst="rect">
-            <a:avLst/>
-          </a:prstGeom>
-          <a:noFill/>
-        </p:spPr>
-        <p:txBody>
-          <a:bodyPr wrap="square">
-            <a:spAutoFit/>
-          </a:bodyPr>
-          <a:lstStyle/>
-          <a:p>
-            <a:pPr algn="l"/>
-            <a:r>
-              <a:rPr sz="1100" b="0" i="1">
-                <a:solidFill>
-                  <a:srgbClr val="44546A"/>
-                </a:solidFill>
-                <a:latin typeface="DM Sans"/>
-              </a:rPr>
-              <a:t>Which region are you based in? (%)</a:t>
-            </a:r>
-          </a:p>
-        </p:txBody>
-      </p:sp>
-      <p:pic>
-        <p:nvPicPr>
-          <p:cNvPr id="5" name="Picture 4" descr="image.png"/>
-          <p:cNvPicPr>
-            <a:picLocks noChangeAspect="1"/>
-          </p:cNvPicPr>
-          <p:nvPr/>
-        </p:nvPicPr>
-        <p:blipFill>
-          <a:blip r:embed="rId2"/>
-          <a:stretch>
-            <a:fillRect/>
-          </a:stretch>
-        </p:blipFill>
-        <p:spPr>
-          <a:xfrm>
-            <a:off x="310896" y="1463040"/>
-            <a:ext cx="6702552" cy="3566160"/>
-          </a:xfrm>
-          <a:prstGeom prst="rect">
-            <a:avLst/>
-          </a:prstGeom>
-        </p:spPr>
-      </p:pic>
-      <p:sp>
-        <p:nvSpPr>
-          <p:cNvPr id="6" name="TextBox 5"/>
-          <p:cNvSpPr txBox="1"/>
-          <p:nvPr/>
-        </p:nvSpPr>
-        <p:spPr>
-          <a:xfrm>
-            <a:off x="7434072" y="1463040"/>
-            <a:ext cx="4389119" cy="3566160"/>
-          </a:xfrm>
-          <a:prstGeom prst="rect">
-            <a:avLst/>
-          </a:prstGeom>
-          <a:noFill/>
-        </p:spPr>
-        <p:txBody>
-          <a:bodyPr wrap="square">
-            <a:spAutoFit/>
-          </a:bodyPr>
-          <a:lstStyle/>
-          <a:p>
-            <a:r>
-              <a:rPr sz="1000" b="0">
-                <a:solidFill>
-                  <a:srgbClr val="44546A"/>
-                </a:solidFill>
-                <a:latin typeface="DM Sans"/>
-              </a:rPr>
-              <a:t>Sample is spread across metro, regional,</a:t>
-            </a:r>
-          </a:p>
-          <a:p>
-            <a:r>
-              <a:rPr sz="1000" b="0">
-                <a:solidFill>
-                  <a:srgbClr val="44546A"/>
-                </a:solidFill>
-                <a:latin typeface="DM Sans"/>
-              </a:rPr>
-              <a:t>rural and remote areas.</a:t>
-            </a:r>
-          </a:p>
-        </p:txBody>
-      </p:sp>
-      <p:sp>
-        <p:nvSpPr>
-          <p:cNvPr id="7" name="TextBox 6"/>
-          <p:cNvSpPr txBox="1"/>
-          <p:nvPr/>
-        </p:nvSpPr>
-        <p:spPr>
-          <a:xfrm>
-            <a:off x="1097280" y="6236208"/>
-            <a:ext cx="10058400" cy="256032"/>
-          </a:xfrm>
-          <a:prstGeom prst="rect">
-            <a:avLst/>
-          </a:prstGeom>
-          <a:noFill/>
-        </p:spPr>
-        <p:txBody>
-          <a:bodyPr wrap="square">
-            <a:spAutoFit/>
-          </a:bodyPr>
-          <a:lstStyle/>
-          <a:p>
-            <a:pPr algn="l"/>
-            <a:r>
-              <a:rPr sz="800" b="0" i="1">
-                <a:solidFill>
-                  <a:srgbClr val="44546A"/>
-                </a:solidFill>
-                <a:latin typeface="DM Sans"/>
-              </a:rPr>
-              <a:t>Base: all respondents (n=200)</a:t>
-            </a:r>
-          </a:p>
-        </p:txBody>
-      </p:sp>
-      <p:sp>
-        <p:nvSpPr>
-          <p:cNvPr id="8" name="Oval 7"/>
-          <p:cNvSpPr/>
-          <p:nvPr/>
-        </p:nvSpPr>
-        <p:spPr>
-          <a:xfrm>
-            <a:off x="11548872" y="6217920"/>
-            <a:ext cx="274320" cy="274320"/>
-          </a:xfrm>
-          <a:prstGeom prst="ellipse">
-            <a:avLst/>
-          </a:prstGeom>
-          <a:solidFill>
-            <a:srgbClr val="027F7C"/>
-          </a:solidFill>
-          <a:ln>
-            <a:noFill/>
-          </a:ln>
-        </p:spPr>
-        <p:style>
-          <a:lnRef idx="1">
-            <a:schemeClr val="accent1"/>
-          </a:lnRef>
-          <a:fillRef idx="3">
-            <a:schemeClr val="accent1"/>
-          </a:fillRef>
-          <a:effectRef idx="2">
-            <a:schemeClr val="accent1"/>
-          </a:effectRef>
-          <a:fontRef idx="minor">
-            <a:schemeClr val="lt1"/>
-          </a:fontRef>
-        </p:style>
-        <p:txBody>
-          <a:bodyPr rtlCol="0" anchor="ctr"/>
-          <a:lstStyle/>
-          <a:p>
-            <a:pPr algn="ctr"/>
-          </a:p>
-        </p:txBody>
-      </p:sp>
-      <p:sp>
-        <p:nvSpPr>
-          <p:cNvPr id="9" name="TextBox 8"/>
+          <p:cNvPr id="8" name="TextBox 7"/>
           <p:cNvSpPr txBox="1"/>
           <p:nvPr/>
         </p:nvSpPr>
